--- a/docs/presentation/Scaling Apex and LWC with Apex Cursors - London's Calling Presentation Deck 2026.pptx
+++ b/docs/presentation/Scaling Apex and LWC with Apex Cursors - London's Calling Presentation Deck 2026.pptx
@@ -14773,54 +14773,37 @@
           <a:chExt cx="0" cy="0"/>
         </a:xfrm>
       </p:grpSpPr>
-      <p:sp>
-        <p:nvSpPr>
-          <p:cNvPr id="115" name="Google Shape;115;p14"/>
-          <p:cNvSpPr txBox="1"/>
-          <p:nvPr>
-            <p:ph idx="1" type="body"/>
-          </p:nvPr>
-        </p:nvSpPr>
+      <p:pic>
+        <p:nvPicPr>
+          <p:cNvPr id="117" name="demo3-adaptive-async" title="Apex Cursor Demo - Adaptive Async"/>
+          <p:cNvPicPr preferRelativeResize="0"/>
+          <p:nvPr/>
+        </p:nvPicPr>
+        <p:blipFill>
+          <a:blip r:embed="rId3">
+            <a:alphaModFix/>
+          </a:blip>
+          <a:stretch>
+            <a:fillRect/>
+          </a:stretch>
+        </p:blipFill>
         <p:spPr>
           <a:xfrm>
-            <a:off x="338325" y="1020943"/>
-            <a:ext cx="11484900" cy="5257200"/>
+            <a:off x="609412" y="1150000"/>
+            <a:ext cx="10970000" cy="5249023"/>
           </a:xfrm>
           <a:prstGeom prst="rect">
             <a:avLst/>
           </a:prstGeom>
-          <a:noFill/>
-          <a:ln>
-            <a:noFill/>
-          </a:ln>
-        </p:spPr>
-        <p:txBody>
-          <a:bodyPr anchorCtr="0" anchor="t" bIns="0" lIns="9125" spcFirstLastPara="1" rIns="0" wrap="square" tIns="0">
-            <a:noAutofit/>
-          </a:bodyPr>
-          <a:lstStyle/>
-          <a:p>
-            <a:pPr indent="0" lvl="0" marL="0" rtl="0" algn="l">
-              <a:lnSpc>
-                <a:spcPct val="100000"/>
-              </a:lnSpc>
-              <a:spcBef>
-                <a:spcPts val="0"/>
-              </a:spcBef>
-              <a:spcAft>
-                <a:spcPts val="0"/>
-              </a:spcAft>
-              <a:buSzPts val="2400"/>
-              <a:buNone/>
-            </a:pPr>
-            <a:r>
-              <a:rPr lang="en-US"/>
-              <a:t/>
-            </a:r>
-            <a:endParaRPr/>
-          </a:p>
-        </p:txBody>
-      </p:sp>
+          <a:effectLst>
+            <a:outerShdw blurRad="63500" dist="47625" dir="2700000" algn="ctr" rotWithShape="0">
+              <a:srgbClr val="000000">
+                <a:alpha val="38000"/>
+              </a:srgbClr>
+            </a:outerShdw>
+          </a:effectLst>
+        </p:spPr>
+      </p:pic>
       <p:sp>
         <p:nvSpPr>
           <p:cNvPr id="116" name="Google Shape;116;p14"/>
@@ -14899,7 +14882,7 @@
     <p:spTree>
       <p:nvGrpSpPr>
         <p:cNvPr id="114" name="Shape 114"/>
-        <p:cNvGrpSpPr/>
+        <p:cNvSpPr/>
         <p:nvPr/>
       </p:nvGrpSpPr>
       <p:grpSpPr>
@@ -14912,27 +14895,36 @@
       </p:grpSpPr>
       <p:sp>
         <p:nvSpPr>
-          <p:cNvPr id="115" name="Google Shape;115;p14"/>
+          <p:cNvPr id="201" name="highlight-code-1"/>
           <p:cNvSpPr txBox="1"/>
-          <p:nvPr>
-            <p:ph idx="1" type="body"/>
-          </p:nvPr>
+          <p:nvPr/>
         </p:nvSpPr>
         <p:spPr>
           <a:xfrm>
-            <a:off x="338325" y="1020943"/>
-            <a:ext cx="11484900" cy="5257200"/>
-          </a:xfrm>
-          <a:prstGeom prst="rect">
-            <a:avLst/>
+            <a:off x="338325" y="1603500"/>
+            <a:ext cx="3748300" cy="2450000"/>
+          </a:xfrm>
+          <a:prstGeom prst="roundRect">
+            <a:avLst>
+              <a:gd name="adj" fmla="val 6000"/>
+            </a:avLst>
           </a:prstGeom>
-          <a:noFill/>
+          <a:solidFill>
+            <a:srgbClr val="1E1E1E"/>
+          </a:solidFill>
           <a:ln>
             <a:noFill/>
           </a:ln>
+          <a:effectLst>
+            <a:outerShdw blurRad="50800" dist="31750" dir="2700000" algn="ctr" rotWithShape="0">
+              <a:srgbClr val="000000">
+                <a:alpha val="28000"/>
+              </a:srgbClr>
+            </a:outerShdw>
+          </a:effectLst>
         </p:spPr>
         <p:txBody>
-          <a:bodyPr anchorCtr="0" anchor="t" bIns="0" lIns="9125" spcFirstLastPara="1" rIns="0" wrap="square" tIns="0">
+          <a:bodyPr anchorCtr="0" anchor="t" bIns="160000" lIns="72000" rIns="72000" tIns="55000" wrap="square">
             <a:noAutofit/>
           </a:bodyPr>
           <a:lstStyle/>
@@ -14942,17 +14934,830 @@
                 <a:spcPct val="100000"/>
               </a:lnSpc>
               <a:spcBef>
-                <a:spcPts val="0"/>
-              </a:spcBef>
-              <a:spcAft>
-                <a:spcPts val="0"/>
-              </a:spcAft>
-              <a:buSzPts val="2400"/>
+                <a:spcPts val="80"/>
+              </a:spcBef>
+              <a:spcAft>
+                <a:spcPts val="0"/>
+              </a:spcAft>
               <a:buNone/>
             </a:pPr>
             <a:r>
-              <a:rPr lang="en-US"/>
-              <a:t/>
+              <a:rPr lang="en-US" sz="1500" typeface="Consolas">
+                <a:solidFill>
+                  <a:srgbClr val="6A9955"/>
+                </a:solidFill>
+              </a:rPr>
+              <a:t>apex&gt;</a:t>
+            </a:r>
+            <a:endParaRPr/>
+          </a:p>
+          <a:p>
+            <a:pPr indent="0" lvl="0" marL="0" rtl="0" algn="l">
+              <a:lnSpc>
+                <a:spcPct val="100000"/>
+              </a:lnSpc>
+              <a:spcBef>
+                <a:spcPts val="60"/>
+              </a:spcBef>
+              <a:spcAft>
+                <a:spcPts val="0"/>
+              </a:spcAft>
+              <a:buNone/>
+            </a:pPr>
+            <a:r>
+              <a:rPr lang="en-US" sz="1500" typeface="Consolas">
+                <a:solidFill>
+                  <a:srgbClr val="D4D4D4"/>
+                </a:solidFill>
+              </a:rPr>
+              <a:t>Database.Cursor cursor =</a:t>
+            </a:r>
+            <a:endParaRPr/>
+          </a:p>
+          <a:p>
+            <a:pPr indent="0" lvl="0" marL="0" rtl="0" algn="l">
+              <a:lnSpc>
+                <a:spcPct val="100000"/>
+              </a:lnSpc>
+              <a:spcBef>
+                <a:spcPts val="40"/>
+              </a:spcBef>
+              <a:spcAft>
+                <a:spcPts val="0"/>
+              </a:spcAft>
+              <a:buNone/>
+            </a:pPr>
+            <a:r>
+              <a:rPr lang="en-US" sz="1500" typeface="Consolas">
+                <a:solidFill>
+                  <a:srgbClr val="DCDCAA"/>
+                </a:solidFill>
+              </a:rPr>
+              <a:t>  Database.getCursor(</a:t>
+            </a:r>
+            <a:endParaRPr/>
+          </a:p>
+          <a:p>
+            <a:pPr indent="0" lvl="0" marL="0" rtl="0" algn="l">
+              <a:lnSpc>
+                <a:spcPct val="100000"/>
+              </a:lnSpc>
+              <a:spcBef>
+                <a:spcPts val="40"/>
+              </a:spcBef>
+              <a:spcAft>
+                <a:spcPts val="0"/>
+              </a:spcAft>
+              <a:buNone/>
+            </a:pPr>
+            <a:r>
+              <a:rPr lang="en-US" sz="1500" typeface="Consolas">
+                <a:solidFill>
+                  <a:srgbClr val="CE9178"/>
+                </a:solidFill>
+              </a:rPr>
+              <a:t>    soql,</a:t>
+            </a:r>
+            <a:endParaRPr/>
+          </a:p>
+          <a:p>
+            <a:pPr indent="0" lvl="0" marL="0" rtl="0" algn="l">
+              <a:lnSpc>
+                <a:spcPct val="100000"/>
+              </a:lnSpc>
+              <a:spcBef>
+                <a:spcPts val="40"/>
+              </a:spcBef>
+              <a:spcAft>
+                <a:spcPts val="0"/>
+              </a:spcAft>
+              <a:buNone/>
+            </a:pPr>
+            <a:r>
+              <a:rPr lang="en-US" sz="1500" typeface="Consolas">
+                <a:solidFill>
+                  <a:srgbClr val="CE9178"/>
+                </a:solidFill>
+              </a:rPr>
+              <a:t>    AccessLevel.USER_MODE);</a:t>
+            </a:r>
+            <a:endParaRPr/>
+          </a:p>
+          <a:p>
+            <a:pPr indent="0" lvl="0" marL="0" rtl="0" algn="l">
+              <a:lnSpc>
+                <a:spcPct val="100000"/>
+              </a:lnSpc>
+              <a:spcBef>
+                <a:spcPts val="40"/>
+              </a:spcBef>
+              <a:spcAft>
+                <a:spcPts val="0"/>
+              </a:spcAft>
+              <a:buNone/>
+            </a:pPr>
+            <a:r>
+              <a:rPr lang="en-US" sz="1500" typeface="Consolas">
+                <a:solidFill>
+                  <a:srgbClr val="DCDCAA"/>
+                </a:solidFill>
+              </a:rPr>
+              <a:t>System.enqueueJob(</a:t>
+            </a:r>
+            <a:endParaRPr/>
+          </a:p>
+          <a:p>
+            <a:pPr indent="0" lvl="0" marL="0" rtl="0" algn="l">
+              <a:lnSpc>
+                <a:spcPct val="100000"/>
+              </a:lnSpc>
+              <a:spcBef>
+                <a:spcPts val="40"/>
+              </a:spcBef>
+              <a:spcAft>
+                <a:spcPts val="0"/>
+              </a:spcAft>
+              <a:buNone/>
+            </a:pPr>
+            <a:r>
+              <a:rPr lang="en-US" sz="1500" typeface="Consolas">
+                <a:solidFill>
+                  <a:srgbClr val="CE9178"/>
+                </a:solidFill>
+              </a:rPr>
+              <a:t>  new AdaptiveOrderWorkerQueueable(</a:t>
+            </a:r>
+            <a:endParaRPr/>
+          </a:p>
+          <a:p>
+            <a:pPr indent="0" lvl="0" marL="0" rtl="0" algn="l">
+              <a:lnSpc>
+                <a:spcPct val="100000"/>
+              </a:lnSpc>
+              <a:spcBef>
+                <a:spcPts val="40"/>
+              </a:spcBef>
+              <a:spcAft>
+                <a:spcPts val="160"/>
+              </a:spcAft>
+              <a:buNone/>
+            </a:pPr>
+            <a:r>
+              <a:rPr lang="en-US" sz="1500" typeface="Consolas">
+                <a:solidFill>
+                  <a:srgbClr val="CE9178"/>
+                </a:solidFill>
+              </a:rPr>
+              <a:t>    runId, cursor, 1), options);</a:t>
+            </a:r>
+            <a:endParaRPr/>
+          </a:p>
+        </p:txBody>
+      </p:sp>
+      <p:sp>
+        <p:nvSpPr>
+          <p:cNvPr id="202" name="highlight-badge-1"/>
+          <p:cNvSpPr txBox="1"/>
+          <p:nvPr/>
+        </p:nvSpPr>
+        <p:spPr>
+          <a:xfrm>
+            <a:off x="127125" y="1392300"/>
+            <a:ext cx="480000" cy="480000"/>
+          </a:xfrm>
+          <a:prstGeom prst="ellipse">
+            <a:avLst/>
+          </a:prstGeom>
+          <a:solidFill>
+            <a:srgbClr val="891019"/>
+          </a:solidFill>
+          <a:ln>
+            <a:noFill/>
+          </a:ln>
+          <a:effectLst>
+            <a:outerShdw blurRad="57150" dist="38100" dir="2700000" algn="ctr" rotWithShape="0">
+              <a:srgbClr val="000000">
+                <a:alpha val="45000"/>
+              </a:srgbClr>
+            </a:outerShdw>
+          </a:effectLst>
+        </p:spPr>
+        <p:txBody>
+          <a:bodyPr anchor="ctr" anchorCtr="1" wrap="none" lIns="0" rIns="0" tIns="0" bIns="0">
+            <a:noAutofit/>
+          </a:bodyPr>
+          <a:lstStyle/>
+          <a:p>
+            <a:pPr algn="ctr">
+              <a:buNone/>
+            </a:pPr>
+            <a:r>
+              <a:rPr lang="en-US" sz="2400" b="1">
+                <a:solidFill>
+                  <a:srgbClr val="FFFFFF"/>
+                </a:solidFill>
+              </a:rPr>
+              <a:t>1</a:t>
+            </a:r>
+            <a:endParaRPr/>
+          </a:p>
+        </p:txBody>
+      </p:sp>
+      <p:sp>
+        <p:nvSpPr>
+          <p:cNvPr id="203" name="highlight-code-2"/>
+          <p:cNvSpPr txBox="1"/>
+          <p:nvPr/>
+        </p:nvSpPr>
+        <p:spPr>
+          <a:xfrm>
+            <a:off x="4206625" y="1603500"/>
+            <a:ext cx="3748300" cy="2450000"/>
+          </a:xfrm>
+          <a:prstGeom prst="roundRect">
+            <a:avLst>
+              <a:gd name="adj" fmla="val 6000"/>
+            </a:avLst>
+          </a:prstGeom>
+          <a:solidFill>
+            <a:srgbClr val="1E1E1E"/>
+          </a:solidFill>
+          <a:ln>
+            <a:noFill/>
+          </a:ln>
+          <a:effectLst>
+            <a:outerShdw blurRad="50800" dist="31750" dir="2700000" algn="ctr" rotWithShape="0">
+              <a:srgbClr val="000000">
+                <a:alpha val="28000"/>
+              </a:srgbClr>
+            </a:outerShdw>
+          </a:effectLst>
+        </p:spPr>
+        <p:txBody>
+          <a:bodyPr anchorCtr="0" anchor="t" bIns="160000" lIns="72000" rIns="72000" tIns="55000" wrap="square">
+            <a:noAutofit/>
+          </a:bodyPr>
+          <a:lstStyle/>
+          <a:p>
+            <a:pPr indent="0" lvl="0" marL="0" rtl="0" algn="l">
+              <a:lnSpc>
+                <a:spcPct val="100000"/>
+              </a:lnSpc>
+              <a:spcBef>
+                <a:spcPts val="80"/>
+              </a:spcBef>
+              <a:spcAft>
+                <a:spcPts val="0"/>
+              </a:spcAft>
+              <a:buNone/>
+            </a:pPr>
+            <a:r>
+              <a:rPr lang="en-US" sz="1500" typeface="Consolas">
+                <a:solidFill>
+                  <a:srgbClr val="6A9955"/>
+                </a:solidFill>
+              </a:rPr>
+              <a:t>apex&gt;</a:t>
+            </a:r>
+            <a:endParaRPr/>
+          </a:p>
+          <a:p>
+            <a:pPr indent="0" lvl="0" marL="0" rtl="0" algn="l">
+              <a:lnSpc>
+                <a:spcPct val="100000"/>
+              </a:lnSpc>
+              <a:spcBef>
+                <a:spcPts val="60"/>
+              </a:spcBef>
+              <a:spcAft>
+                <a:spcPts val="0"/>
+              </a:spcAft>
+              <a:buNone/>
+            </a:pPr>
+            <a:r>
+              <a:rPr lang="en-US" sz="1500" typeface="Consolas">
+                <a:solidFill>
+                  <a:srgbClr val="569CD6"/>
+                </a:solidFill>
+              </a:rPr>
+              <a:t>for (Order row :</a:t>
+            </a:r>
+            <a:endParaRPr/>
+          </a:p>
+          <a:p>
+            <a:pPr indent="0" lvl="0" marL="0" rtl="0" algn="l">
+              <a:lnSpc>
+                <a:spcPct val="100000"/>
+              </a:lnSpc>
+              <a:spcBef>
+                <a:spcPts val="40"/>
+              </a:spcBef>
+              <a:spcAft>
+                <a:spcPts val="0"/>
+              </a:spcAft>
+              <a:buNone/>
+            </a:pPr>
+            <a:r>
+              <a:rPr lang="en-US" sz="1500" typeface="Consolas">
+                <a:solidFill>
+                  <a:srgbClr val="DCDCAA"/>
+                </a:solidFill>
+              </a:rPr>
+              <a:t>  cursor.fetch(pos,</a:t>
+            </a:r>
+            <a:endParaRPr/>
+          </a:p>
+          <a:p>
+            <a:pPr indent="0" lvl="0" marL="0" rtl="0" algn="l">
+              <a:lnSpc>
+                <a:spcPct val="100000"/>
+              </a:lnSpc>
+              <a:spcBef>
+                <a:spcPts val="40"/>
+              </a:spcBef>
+              <a:spcAft>
+                <a:spcPts val="0"/>
+              </a:spcAft>
+              <a:buNone/>
+            </a:pPr>
+            <a:r>
+              <a:rPr lang="en-US" sz="1500" typeface="Consolas">
+                <a:solidFill>
+                  <a:srgbClr val="CE9178"/>
+                </a:solidFill>
+              </a:rPr>
+              <a:t>    batchSize)) {</a:t>
+            </a:r>
+            <a:endParaRPr/>
+          </a:p>
+          <a:p>
+            <a:pPr indent="0" lvl="0" marL="0" rtl="0" algn="l">
+              <a:lnSpc>
+                <a:spcPct val="100000"/>
+              </a:lnSpc>
+              <a:spcBef>
+                <a:spcPts val="40"/>
+              </a:spcBef>
+              <a:spcAft>
+                <a:spcPts val="0"/>
+              </a:spcAft>
+              <a:buNone/>
+            </a:pPr>
+            <a:r>
+              <a:rPr lang="en-US" sz="1500" typeface="Consolas">
+                <a:solidFill>
+                  <a:srgbClr val="D4D4D4"/>
+                </a:solidFill>
+              </a:rPr>
+              <a:t>  rowCallouts =</a:t>
+            </a:r>
+            <a:endParaRPr/>
+          </a:p>
+          <a:p>
+            <a:pPr indent="0" lvl="0" marL="0" rtl="0" algn="l">
+              <a:lnSpc>
+                <a:spcPct val="100000"/>
+              </a:lnSpc>
+              <a:spcBef>
+                <a:spcPts val="40"/>
+              </a:spcBef>
+              <a:spcAft>
+                <a:spcPts val="0"/>
+              </a:spcAft>
+              <a:buNone/>
+            </a:pPr>
+            <a:r>
+              <a:rPr lang="en-US" sz="1500" typeface="Consolas">
+                <a:solidFill>
+                  <a:srgbClr val="DCDCAA"/>
+                </a:solidFill>
+              </a:rPr>
+              <a:t>    rowCalloutsFor(row);</a:t>
+            </a:r>
+            <a:endParaRPr/>
+          </a:p>
+          <a:p>
+            <a:pPr indent="0" lvl="0" marL="0" rtl="0" algn="l">
+              <a:lnSpc>
+                <a:spcPct val="100000"/>
+              </a:lnSpc>
+              <a:spcBef>
+                <a:spcPts val="40"/>
+              </a:spcBef>
+              <a:spcAft>
+                <a:spcPts val="160"/>
+              </a:spcAft>
+              <a:buNone/>
+            </a:pPr>
+            <a:r>
+              <a:rPr lang="en-US" sz="1500" typeface="Consolas">
+                <a:solidFill>
+                  <a:srgbClr val="6A9955"/>
+                </a:solidFill>
+              </a:rPr>
+              <a:t>  // pack to callout budget</a:t>
+            </a:r>
+            <a:endParaRPr/>
+          </a:p>
+        </p:txBody>
+      </p:sp>
+      <p:sp>
+        <p:nvSpPr>
+          <p:cNvPr id="204" name="highlight-badge-2"/>
+          <p:cNvSpPr txBox="1"/>
+          <p:nvPr/>
+        </p:nvSpPr>
+        <p:spPr>
+          <a:xfrm>
+            <a:off x="3995425" y="1392300"/>
+            <a:ext cx="480000" cy="480000"/>
+          </a:xfrm>
+          <a:prstGeom prst="ellipse">
+            <a:avLst/>
+          </a:prstGeom>
+          <a:solidFill>
+            <a:srgbClr val="891019"/>
+          </a:solidFill>
+          <a:ln>
+            <a:noFill/>
+          </a:ln>
+          <a:effectLst>
+            <a:outerShdw blurRad="57150" dist="38100" dir="2700000" algn="ctr" rotWithShape="0">
+              <a:srgbClr val="000000">
+                <a:alpha val="45000"/>
+              </a:srgbClr>
+            </a:outerShdw>
+          </a:effectLst>
+        </p:spPr>
+        <p:txBody>
+          <a:bodyPr anchor="ctr" anchorCtr="1" wrap="none" lIns="0" rIns="0" tIns="0" bIns="0">
+            <a:noAutofit/>
+          </a:bodyPr>
+          <a:lstStyle/>
+          <a:p>
+            <a:pPr algn="ctr">
+              <a:buNone/>
+            </a:pPr>
+            <a:r>
+              <a:rPr lang="en-US" sz="2400" b="1">
+                <a:solidFill>
+                  <a:srgbClr val="FFFFFF"/>
+                </a:solidFill>
+              </a:rPr>
+              <a:t>2</a:t>
+            </a:r>
+            <a:endParaRPr/>
+          </a:p>
+        </p:txBody>
+      </p:sp>
+      <p:sp>
+        <p:nvSpPr>
+          <p:cNvPr id="205" name="highlight-code-3"/>
+          <p:cNvSpPr txBox="1"/>
+          <p:nvPr/>
+        </p:nvSpPr>
+        <p:spPr>
+          <a:xfrm>
+            <a:off x="8074925" y="1603500"/>
+            <a:ext cx="3748300" cy="2450000"/>
+          </a:xfrm>
+          <a:prstGeom prst="roundRect">
+            <a:avLst>
+              <a:gd name="adj" fmla="val 6000"/>
+            </a:avLst>
+          </a:prstGeom>
+          <a:solidFill>
+            <a:srgbClr val="1E1E1E"/>
+          </a:solidFill>
+          <a:ln>
+            <a:noFill/>
+          </a:ln>
+          <a:effectLst>
+            <a:outerShdw blurRad="50800" dist="31750" dir="2700000" algn="ctr" rotWithShape="0">
+              <a:srgbClr val="000000">
+                <a:alpha val="28000"/>
+              </a:srgbClr>
+            </a:outerShdw>
+          </a:effectLst>
+        </p:spPr>
+        <p:txBody>
+          <a:bodyPr anchorCtr="0" anchor="t" bIns="160000" lIns="72000" rIns="72000" tIns="55000" wrap="square">
+            <a:noAutofit/>
+          </a:bodyPr>
+          <a:lstStyle/>
+          <a:p>
+            <a:pPr indent="0" lvl="0" marL="0" rtl="0" algn="l">
+              <a:lnSpc>
+                <a:spcPct val="100000"/>
+              </a:lnSpc>
+              <a:spcBef>
+                <a:spcPts val="80"/>
+              </a:spcBef>
+              <a:spcAft>
+                <a:spcPts val="0"/>
+              </a:spcAft>
+              <a:buNone/>
+            </a:pPr>
+            <a:r>
+              <a:rPr lang="en-US" sz="1500" typeface="Consolas">
+                <a:solidFill>
+                  <a:srgbClr val="6A9955"/>
+                </a:solidFill>
+              </a:rPr>
+              <a:t>apex&gt;</a:t>
+            </a:r>
+            <a:endParaRPr/>
+          </a:p>
+          <a:p>
+            <a:pPr indent="0" lvl="0" marL="0" rtl="0" algn="l">
+              <a:lnSpc>
+                <a:spcPct val="100000"/>
+              </a:lnSpc>
+              <a:spcBef>
+                <a:spcPts val="60"/>
+              </a:spcBef>
+              <a:spcAft>
+                <a:spcPts val="0"/>
+              </a:spcAft>
+              <a:buNone/>
+            </a:pPr>
+            <a:r>
+              <a:rPr lang="en-US" sz="1500" typeface="Consolas">
+                <a:solidFill>
+                  <a:srgbClr val="569CD6"/>
+                </a:solidFill>
+              </a:rPr>
+              <a:t>if (moreOrders) {</a:t>
+            </a:r>
+            <a:endParaRPr/>
+          </a:p>
+          <a:p>
+            <a:pPr indent="0" lvl="0" marL="0" rtl="0" algn="l">
+              <a:lnSpc>
+                <a:spcPct val="100000"/>
+              </a:lnSpc>
+              <a:spcBef>
+                <a:spcPts val="40"/>
+              </a:spcBef>
+              <a:spcAft>
+                <a:spcPts val="0"/>
+              </a:spcAft>
+              <a:buNone/>
+            </a:pPr>
+            <a:r>
+              <a:rPr lang="en-US" sz="1500" typeface="Consolas">
+                <a:solidFill>
+                  <a:srgbClr val="DCDCAA"/>
+                </a:solidFill>
+              </a:rPr>
+              <a:t>  sequence++;</a:t>
+            </a:r>
+            <a:endParaRPr/>
+          </a:p>
+          <a:p>
+            <a:pPr indent="0" lvl="0" marL="0" rtl="0" algn="l">
+              <a:lnSpc>
+                <a:spcPct val="100000"/>
+              </a:lnSpc>
+              <a:spcBef>
+                <a:spcPts val="40"/>
+              </a:spcBef>
+              <a:spcAft>
+                <a:spcPts val="0"/>
+              </a:spcAft>
+              <a:buNone/>
+            </a:pPr>
+            <a:r>
+              <a:rPr lang="en-US" sz="1500" typeface="Consolas">
+                <a:solidFill>
+                  <a:srgbClr val="DCDCAA"/>
+                </a:solidFill>
+              </a:rPr>
+              <a:t>  System.enqueueJob(this);</a:t>
+            </a:r>
+            <a:endParaRPr/>
+          </a:p>
+          <a:p>
+            <a:pPr indent="0" lvl="0" marL="0" rtl="0" algn="l">
+              <a:lnSpc>
+                <a:spcPct val="100000"/>
+              </a:lnSpc>
+              <a:spcBef>
+                <a:spcPts val="40"/>
+              </a:spcBef>
+              <a:spcAft>
+                <a:spcPts val="0"/>
+              </a:spcAft>
+              <a:buNone/>
+            </a:pPr>
+            <a:r>
+              <a:rPr lang="en-US" sz="1500" typeface="Consolas">
+                <a:solidFill>
+                  <a:srgbClr val="569CD6"/>
+                </a:solidFill>
+              </a:rPr>
+              <a:t>}</a:t>
+            </a:r>
+            <a:endParaRPr/>
+          </a:p>
+          <a:p>
+            <a:pPr indent="0" lvl="0" marL="0" rtl="0" algn="l">
+              <a:lnSpc>
+                <a:spcPct val="100000"/>
+              </a:lnSpc>
+              <a:spcBef>
+                <a:spcPts val="40"/>
+              </a:spcBef>
+              <a:spcAft>
+                <a:spcPts val="160"/>
+              </a:spcAft>
+              <a:buNone/>
+            </a:pPr>
+            <a:r>
+              <a:rPr lang="en-US" sz="1500" typeface="Consolas">
+                <a:solidFill>
+                  <a:srgbClr val="DCDCAA"/>
+                </a:solidFill>
+              </a:rPr>
+              <a:t>System.attachFinalizer(this);</a:t>
+            </a:r>
+            <a:endParaRPr/>
+          </a:p>
+        </p:txBody>
+      </p:sp>
+      <p:sp>
+        <p:nvSpPr>
+          <p:cNvPr id="206" name="highlight-badge-3"/>
+          <p:cNvSpPr txBox="1"/>
+          <p:nvPr/>
+        </p:nvSpPr>
+        <p:spPr>
+          <a:xfrm>
+            <a:off x="7863725" y="1392300"/>
+            <a:ext cx="480000" cy="480000"/>
+          </a:xfrm>
+          <a:prstGeom prst="ellipse">
+            <a:avLst/>
+          </a:prstGeom>
+          <a:solidFill>
+            <a:srgbClr val="891019"/>
+          </a:solidFill>
+          <a:ln>
+            <a:noFill/>
+          </a:ln>
+          <a:effectLst>
+            <a:outerShdw blurRad="57150" dist="38100" dir="2700000" algn="ctr" rotWithShape="0">
+              <a:srgbClr val="000000">
+                <a:alpha val="45000"/>
+              </a:srgbClr>
+            </a:outerShdw>
+          </a:effectLst>
+        </p:spPr>
+        <p:txBody>
+          <a:bodyPr anchor="ctr" anchorCtr="1" wrap="none" lIns="0" rIns="0" tIns="0" bIns="0">
+            <a:noAutofit/>
+          </a:bodyPr>
+          <a:lstStyle/>
+          <a:p>
+            <a:pPr algn="ctr">
+              <a:buNone/>
+            </a:pPr>
+            <a:r>
+              <a:rPr lang="en-US" sz="2400" b="1">
+                <a:solidFill>
+                  <a:srgbClr val="FFFFFF"/>
+                </a:solidFill>
+              </a:rPr>
+              <a:t>3</a:t>
+            </a:r>
+            <a:endParaRPr/>
+          </a:p>
+        </p:txBody>
+      </p:sp>
+      <p:sp>
+        <p:nvSpPr>
+          <p:cNvPr id="207" name="highlight-info-panel"/>
+          <p:cNvSpPr txBox="1"/>
+          <p:nvPr/>
+        </p:nvSpPr>
+        <p:spPr>
+          <a:xfrm>
+            <a:off x="338325" y="4173500"/>
+            <a:ext cx="11484900" cy="1950000"/>
+          </a:xfrm>
+          <a:prstGeom prst="roundRect">
+            <a:avLst>
+              <a:gd name="adj" fmla="val 6000"/>
+            </a:avLst>
+          </a:prstGeom>
+          <a:solidFill>
+            <a:srgbClr val="F4F7FC"/>
+          </a:solidFill>
+          <a:ln>
+            <a:noFill/>
+          </a:ln>
+          <a:effectLst>
+            <a:outerShdw blurRad="50800" dist="31750" dir="2700000" algn="ctr" rotWithShape="0">
+              <a:srgbClr val="000000">
+                <a:alpha val="28000"/>
+              </a:srgbClr>
+            </a:outerShdw>
+          </a:effectLst>
+        </p:spPr>
+        <p:txBody>
+          <a:bodyPr anchorCtr="0" anchor="t" bIns="120000" lIns="140000" rIns="120000" tIns="120000" wrap="square">
+            <a:noAutofit/>
+          </a:bodyPr>
+          <a:lstStyle/>
+          <a:p>
+            <a:pPr indent="-285750" lvl="0" marL="457200" rtl="0" algn="l">
+              <a:lnSpc>
+                <a:spcPct val="115000"/>
+              </a:lnSpc>
+              <a:spcBef>
+                <a:spcPts val="360"/>
+              </a:spcBef>
+              <a:spcAft>
+                <a:spcPts val="0"/>
+              </a:spcAft>
+              <a:buClr>
+                <a:srgbClr val="891019"/>
+              </a:buClr>
+              <a:buSzPts val="1600"/>
+              <a:buChar char="•"/>
+            </a:pPr>
+            <a:r>
+              <a:rPr lang="en-US" sz="1800"/>
+              <a:t>One cursor opened in Apex and passed through chained queueable jobs</a:t>
+            </a:r>
+            <a:endParaRPr/>
+          </a:p>
+          <a:p>
+            <a:pPr indent="-285750" lvl="0" marL="457200" rtl="0" algn="l">
+              <a:lnSpc>
+                <a:spcPct val="115000"/>
+              </a:lnSpc>
+              <a:spcBef>
+                <a:spcPts val="220"/>
+              </a:spcBef>
+              <a:spcAft>
+                <a:spcPts val="0"/>
+              </a:spcAft>
+              <a:buClr>
+                <a:srgbClr val="891019"/>
+              </a:buClr>
+              <a:buSzPts val="1600"/>
+              <a:buChar char="•"/>
+            </a:pPr>
+            <a:r>
+              <a:rPr lang="en-US" sz="1800"/>
+              <a:t>Chunk size adapts to remaining HTTP callout budget per transaction</a:t>
+            </a:r>
+            <a:endParaRPr/>
+          </a:p>
+          <a:p>
+            <a:pPr indent="-285750" lvl="0" marL="457200" rtl="0" algn="l">
+              <a:lnSpc>
+                <a:spcPct val="115000"/>
+              </a:lnSpc>
+              <a:spcBef>
+                <a:spcPts val="220"/>
+              </a:spcBef>
+              <a:spcAft>
+                <a:spcPts val="0"/>
+              </a:spcAft>
+              <a:buClr>
+                <a:srgbClr val="891019"/>
+              </a:buClr>
+              <a:buSzPts val="1600"/>
+              <a:buChar char="•"/>
+            </a:pPr>
+            <a:r>
+              <a:rPr lang="en-US" sz="1800"/>
+              <a:t>Finalizer publishes platform events after each chunk commits</a:t>
+            </a:r>
+            <a:endParaRPr/>
+          </a:p>
+          <a:p>
+            <a:pPr indent="-285750" lvl="0" marL="457200" rtl="0" algn="l">
+              <a:lnSpc>
+                <a:spcPct val="115000"/>
+              </a:lnSpc>
+              <a:spcBef>
+                <a:spcPts val="220"/>
+              </a:spcBef>
+              <a:spcAft>
+                <a:spcPts val="120"/>
+              </a:spcAft>
+              <a:buClr>
+                <a:srgbClr val="891019"/>
+              </a:buClr>
+              <a:buSzPts val="1600"/>
+              <a:buChar char="•"/>
+            </a:pPr>
+            <a:r>
+              <a:rPr lang="en-US" sz="1800"/>
+              <a:t>Cursor position travels on the job — no Database.Stateful required</a:t>
             </a:r>
             <a:endParaRPr/>
           </a:p>
@@ -15036,7 +15841,7 @@
     <p:spTree>
       <p:nvGrpSpPr>
         <p:cNvPr id="114" name="Shape 114"/>
-        <p:cNvGrpSpPr/>
+        <p:cNvSpPr/>
         <p:nvPr/>
       </p:nvGrpSpPr>
       <p:grpSpPr>
@@ -15049,16 +15854,83 @@
       </p:grpSpPr>
       <p:sp>
         <p:nvSpPr>
-          <p:cNvPr id="115" name="Google Shape;115;p14"/>
+          <p:cNvPr id="201" name="limits-table-shadow"/>
+          <p:cNvSpPr/>
+          <p:nvPr/>
+        </p:nvSpPr>
+        <p:spPr>
+          <a:xfrm>
+            <a:off x="338325" y="2128500"/>
+            <a:ext cx="11484900" cy="2460000"/>
+          </a:xfrm>
+          <a:prstGeom prst="rect">
+            <a:avLst/>
+          </a:prstGeom>
+          <a:solidFill>
+            <a:srgbClr val="FFFFFF"/>
+          </a:solidFill>
+          <a:ln w="9525">
+            <a:solidFill>
+              <a:srgbClr val="E8E8E8"/>
+            </a:solidFill>
+          </a:ln>
+          <a:effectLst>
+            <a:outerShdw blurRad="50800" dist="31750" dir="2700000" algn="ctr" rotWithShape="0">
+              <a:srgbClr val="000000">
+                <a:alpha val="28000"/>
+              </a:srgbClr>
+            </a:outerShdw>
+          </a:effectLst>
+        </p:spPr>
+        <p:txBody>
+          <a:bodyPr/>
+          <a:lstStyle/>
+          <a:p>
+            <a:endParaRPr/>
+          </a:p>
+        </p:txBody>
+      </p:sp>
+      <p:sp>
+        <p:nvSpPr>
+          <p:cNvPr id="202" name="limits-hdr-bg-0"/>
+          <p:cNvSpPr/>
+          <p:nvPr/>
+        </p:nvSpPr>
+        <p:spPr>
+          <a:xfrm>
+            <a:off x="338325" y="2128500"/>
+            <a:ext cx="5742450" cy="460000"/>
+          </a:xfrm>
+          <a:prstGeom prst="rect">
+            <a:avLst/>
+          </a:prstGeom>
+          <a:solidFill>
+            <a:srgbClr val="891019"/>
+          </a:solidFill>
+          <a:ln w="9525">
+            <a:solidFill>
+              <a:srgbClr val="E8E8E8"/>
+            </a:solidFill>
+          </a:ln>
+        </p:spPr>
+        <p:txBody>
+          <a:bodyPr/>
+          <a:lstStyle/>
+          <a:p>
+            <a:endParaRPr/>
+          </a:p>
+        </p:txBody>
+      </p:sp>
+      <p:sp>
+        <p:nvSpPr>
+          <p:cNvPr id="203" name="limits-hdr-0"/>
           <p:cNvSpPr txBox="1"/>
-          <p:nvPr>
-            <p:ph idx="1" type="body"/>
-          </p:nvPr>
+          <p:nvPr/>
         </p:nvSpPr>
         <p:spPr>
           <a:xfrm>
-            <a:off x="338325" y="1020943"/>
-            <a:ext cx="11484900" cy="5257200"/>
+            <a:off x="338325" y="2128500"/>
+            <a:ext cx="5742450" cy="460000"/>
           </a:xfrm>
           <a:prstGeom prst="rect">
             <a:avLst/>
@@ -15069,7 +15941,7 @@
           </a:ln>
         </p:spPr>
         <p:txBody>
-          <a:bodyPr anchorCtr="0" anchor="t" bIns="0" lIns="9125" spcFirstLastPara="1" rIns="0" wrap="square" tIns="0">
+          <a:bodyPr anchor="ctr" anchorCtr="1" wrap="none" lIns="110000" rIns="40000" tIns="0" bIns="0">
             <a:noAutofit/>
           </a:bodyPr>
           <a:lstStyle/>
@@ -15084,12 +15956,1458 @@
               <a:spcAft>
                 <a:spcPts val="0"/>
               </a:spcAft>
-              <a:buSzPts val="2400"/>
               <a:buNone/>
             </a:pPr>
             <a:r>
-              <a:rPr lang="en-US"/>
-              <a:t/>
+              <a:rPr lang="en-US" sz="1900" b="1">
+                <a:solidFill>
+                  <a:srgbClr val="FFFFFF"/>
+                </a:solidFill>
+              </a:rPr>
+              <a:t>Limit</a:t>
+            </a:r>
+            <a:endParaRPr/>
+          </a:p>
+        </p:txBody>
+      </p:sp>
+      <p:sp>
+        <p:nvSpPr>
+          <p:cNvPr id="204" name="limits-hdr-bg-1"/>
+          <p:cNvSpPr/>
+          <p:nvPr/>
+        </p:nvSpPr>
+        <p:spPr>
+          <a:xfrm>
+            <a:off x="6080775" y="2128500"/>
+            <a:ext cx="2871225" cy="460000"/>
+          </a:xfrm>
+          <a:prstGeom prst="rect">
+            <a:avLst/>
+          </a:prstGeom>
+          <a:solidFill>
+            <a:srgbClr val="4A6FA5"/>
+          </a:solidFill>
+          <a:ln w="9525">
+            <a:solidFill>
+              <a:srgbClr val="E8E8E8"/>
+            </a:solidFill>
+          </a:ln>
+        </p:spPr>
+        <p:txBody>
+          <a:bodyPr/>
+          <a:lstStyle/>
+          <a:p>
+            <a:endParaRPr/>
+          </a:p>
+        </p:txBody>
+      </p:sp>
+      <p:sp>
+        <p:nvSpPr>
+          <p:cNvPr id="205" name="limits-hdr-1"/>
+          <p:cNvSpPr txBox="1"/>
+          <p:nvPr/>
+        </p:nvSpPr>
+        <p:spPr>
+          <a:xfrm>
+            <a:off x="6080775" y="2128500"/>
+            <a:ext cx="2871225" cy="460000"/>
+          </a:xfrm>
+          <a:prstGeom prst="rect">
+            <a:avLst/>
+          </a:prstGeom>
+          <a:noFill/>
+          <a:ln>
+            <a:noFill/>
+          </a:ln>
+        </p:spPr>
+        <p:txBody>
+          <a:bodyPr anchor="ctr" anchorCtr="1" wrap="none" lIns="40000" rIns="40000" tIns="0" bIns="0">
+            <a:noAutofit/>
+          </a:bodyPr>
+          <a:lstStyle/>
+          <a:p>
+            <a:pPr indent="0" lvl="0" marL="0" rtl="0" algn="ctr">
+              <a:lnSpc>
+                <a:spcPct val="100000"/>
+              </a:lnSpc>
+              <a:spcBef>
+                <a:spcPts val="0"/>
+              </a:spcBef>
+              <a:spcAft>
+                <a:spcPts val="0"/>
+              </a:spcAft>
+              <a:buNone/>
+            </a:pPr>
+            <a:r>
+              <a:rPr lang="en-US" sz="1900" b="1">
+                <a:solidFill>
+                  <a:srgbClr val="FFFFFF"/>
+                </a:solidFill>
+              </a:rPr>
+              <a:t>Pagination</a:t>
+            </a:r>
+            <a:endParaRPr/>
+          </a:p>
+        </p:txBody>
+      </p:sp>
+      <p:sp>
+        <p:nvSpPr>
+          <p:cNvPr id="206" name="limits-hdr-bg-2"/>
+          <p:cNvSpPr/>
+          <p:nvPr/>
+        </p:nvSpPr>
+        <p:spPr>
+          <a:xfrm>
+            <a:off x="8952000" y="2128500"/>
+            <a:ext cx="2871225" cy="460000"/>
+          </a:xfrm>
+          <a:prstGeom prst="rect">
+            <a:avLst/>
+          </a:prstGeom>
+          <a:solidFill>
+            <a:srgbClr val="5A7A3A"/>
+          </a:solidFill>
+          <a:ln w="9525">
+            <a:solidFill>
+              <a:srgbClr val="E8E8E8"/>
+            </a:solidFill>
+          </a:ln>
+        </p:spPr>
+        <p:txBody>
+          <a:bodyPr/>
+          <a:lstStyle/>
+          <a:p>
+            <a:endParaRPr/>
+          </a:p>
+        </p:txBody>
+      </p:sp>
+      <p:sp>
+        <p:nvSpPr>
+          <p:cNvPr id="207" name="limits-hdr-2"/>
+          <p:cNvSpPr txBox="1"/>
+          <p:nvPr/>
+        </p:nvSpPr>
+        <p:spPr>
+          <a:xfrm>
+            <a:off x="8952000" y="2128500"/>
+            <a:ext cx="2871225" cy="460000"/>
+          </a:xfrm>
+          <a:prstGeom prst="rect">
+            <a:avLst/>
+          </a:prstGeom>
+          <a:noFill/>
+          <a:ln>
+            <a:noFill/>
+          </a:ln>
+        </p:spPr>
+        <p:txBody>
+          <a:bodyPr anchor="ctr" anchorCtr="1" wrap="none" lIns="40000" rIns="40000" tIns="0" bIns="0">
+            <a:noAutofit/>
+          </a:bodyPr>
+          <a:lstStyle/>
+          <a:p>
+            <a:pPr indent="0" lvl="0" marL="0" rtl="0" algn="ctr">
+              <a:lnSpc>
+                <a:spcPct val="100000"/>
+              </a:lnSpc>
+              <a:spcBef>
+                <a:spcPts val="0"/>
+              </a:spcBef>
+              <a:spcAft>
+                <a:spcPts val="0"/>
+              </a:spcAft>
+              <a:buNone/>
+            </a:pPr>
+            <a:r>
+              <a:rPr lang="en-US" sz="1900" b="1">
+                <a:solidFill>
+                  <a:srgbClr val="FFFFFF"/>
+                </a:solidFill>
+              </a:rPr>
+              <a:t>Standard</a:t>
+            </a:r>
+            <a:endParaRPr/>
+          </a:p>
+        </p:txBody>
+      </p:sp>
+      <p:sp>
+        <p:nvSpPr>
+          <p:cNvPr id="208" name="limits-row-0-bg-0"/>
+          <p:cNvSpPr/>
+          <p:nvPr/>
+        </p:nvSpPr>
+        <p:spPr>
+          <a:xfrm>
+            <a:off x="338325" y="2588500"/>
+            <a:ext cx="5742450" cy="400000"/>
+          </a:xfrm>
+          <a:prstGeom prst="rect">
+            <a:avLst/>
+          </a:prstGeom>
+          <a:solidFill>
+            <a:srgbClr val="F9FAFC"/>
+          </a:solidFill>
+          <a:ln w="9525">
+            <a:solidFill>
+              <a:srgbClr val="E8E8E8"/>
+            </a:solidFill>
+          </a:ln>
+        </p:spPr>
+        <p:txBody>
+          <a:bodyPr/>
+          <a:lstStyle/>
+          <a:p>
+            <a:endParaRPr/>
+          </a:p>
+        </p:txBody>
+      </p:sp>
+      <p:sp>
+        <p:nvSpPr>
+          <p:cNvPr id="209" name="limits-row-0-0"/>
+          <p:cNvSpPr txBox="1"/>
+          <p:nvPr/>
+        </p:nvSpPr>
+        <p:spPr>
+          <a:xfrm>
+            <a:off x="338325" y="2588500"/>
+            <a:ext cx="5742450" cy="400000"/>
+          </a:xfrm>
+          <a:prstGeom prst="rect">
+            <a:avLst/>
+          </a:prstGeom>
+          <a:noFill/>
+          <a:ln>
+            <a:noFill/>
+          </a:ln>
+        </p:spPr>
+        <p:txBody>
+          <a:bodyPr anchor="ctr" anchorCtr="1" wrap="none" lIns="110000" rIns="40000" tIns="0" bIns="0">
+            <a:noAutofit/>
+          </a:bodyPr>
+          <a:lstStyle/>
+          <a:p>
+            <a:pPr indent="0" lvl="0" marL="0" rtl="0" algn="l">
+              <a:lnSpc>
+                <a:spcPct val="100000"/>
+              </a:lnSpc>
+              <a:spcBef>
+                <a:spcPts val="0"/>
+              </a:spcBef>
+              <a:spcAft>
+                <a:spcPts val="0"/>
+              </a:spcAft>
+              <a:buNone/>
+            </a:pPr>
+            <a:r>
+              <a:rPr lang="en-US" sz="1750" b="1">
+                <a:solidFill>
+                  <a:srgbClr val="333333"/>
+                </a:solidFill>
+              </a:rPr>
+              <a:t>Cursors (per transaction)</a:t>
+            </a:r>
+            <a:endParaRPr/>
+          </a:p>
+        </p:txBody>
+      </p:sp>
+      <p:sp>
+        <p:nvSpPr>
+          <p:cNvPr id="210" name="limits-row-0-bg-1"/>
+          <p:cNvSpPr/>
+          <p:nvPr/>
+        </p:nvSpPr>
+        <p:spPr>
+          <a:xfrm>
+            <a:off x="6080775" y="2588500"/>
+            <a:ext cx="2871225" cy="400000"/>
+          </a:xfrm>
+          <a:prstGeom prst="rect">
+            <a:avLst/>
+          </a:prstGeom>
+          <a:solidFill>
+            <a:srgbClr val="F9FAFC"/>
+          </a:solidFill>
+          <a:ln w="9525">
+            <a:solidFill>
+              <a:srgbClr val="E8E8E8"/>
+            </a:solidFill>
+          </a:ln>
+        </p:spPr>
+        <p:txBody>
+          <a:bodyPr/>
+          <a:lstStyle/>
+          <a:p>
+            <a:endParaRPr/>
+          </a:p>
+        </p:txBody>
+      </p:sp>
+      <p:sp>
+        <p:nvSpPr>
+          <p:cNvPr id="211" name="limits-row-0-1"/>
+          <p:cNvSpPr txBox="1"/>
+          <p:nvPr/>
+        </p:nvSpPr>
+        <p:spPr>
+          <a:xfrm>
+            <a:off x="6080775" y="2588500"/>
+            <a:ext cx="2871225" cy="400000"/>
+          </a:xfrm>
+          <a:prstGeom prst="rect">
+            <a:avLst/>
+          </a:prstGeom>
+          <a:noFill/>
+          <a:ln>
+            <a:noFill/>
+          </a:ln>
+        </p:spPr>
+        <p:txBody>
+          <a:bodyPr anchor="ctr" anchorCtr="1" wrap="none" lIns="40000" rIns="40000" tIns="0" bIns="0">
+            <a:noAutofit/>
+          </a:bodyPr>
+          <a:lstStyle/>
+          <a:p>
+            <a:pPr indent="0" lvl="0" marL="0" rtl="0" algn="ctr">
+              <a:lnSpc>
+                <a:spcPct val="100000"/>
+              </a:lnSpc>
+              <a:spcBef>
+                <a:spcPts val="0"/>
+              </a:spcBef>
+              <a:spcAft>
+                <a:spcPts val="0"/>
+              </a:spcAft>
+              <a:buNone/>
+            </a:pPr>
+            <a:r>
+              <a:rPr lang="en-US" sz="1800">
+                <a:solidFill>
+                  <a:srgbClr val="444444"/>
+                </a:solidFill>
+              </a:rPr>
+              <a:t>50</a:t>
+            </a:r>
+            <a:endParaRPr/>
+          </a:p>
+        </p:txBody>
+      </p:sp>
+      <p:sp>
+        <p:nvSpPr>
+          <p:cNvPr id="212" name="limits-row-0-bg-2"/>
+          <p:cNvSpPr/>
+          <p:nvPr/>
+        </p:nvSpPr>
+        <p:spPr>
+          <a:xfrm>
+            <a:off x="8952000" y="2588500"/>
+            <a:ext cx="2871225" cy="400000"/>
+          </a:xfrm>
+          <a:prstGeom prst="rect">
+            <a:avLst/>
+          </a:prstGeom>
+          <a:solidFill>
+            <a:srgbClr val="F9FAFC"/>
+          </a:solidFill>
+          <a:ln w="9525">
+            <a:solidFill>
+              <a:srgbClr val="E8E8E8"/>
+            </a:solidFill>
+          </a:ln>
+        </p:spPr>
+        <p:txBody>
+          <a:bodyPr/>
+          <a:lstStyle/>
+          <a:p>
+            <a:endParaRPr/>
+          </a:p>
+        </p:txBody>
+      </p:sp>
+      <p:sp>
+        <p:nvSpPr>
+          <p:cNvPr id="213" name="limits-row-0-2"/>
+          <p:cNvSpPr txBox="1"/>
+          <p:nvPr/>
+        </p:nvSpPr>
+        <p:spPr>
+          <a:xfrm>
+            <a:off x="8952000" y="2588500"/>
+            <a:ext cx="2871225" cy="400000"/>
+          </a:xfrm>
+          <a:prstGeom prst="rect">
+            <a:avLst/>
+          </a:prstGeom>
+          <a:noFill/>
+          <a:ln>
+            <a:noFill/>
+          </a:ln>
+        </p:spPr>
+        <p:txBody>
+          <a:bodyPr anchor="ctr" anchorCtr="1" wrap="none" lIns="40000" rIns="40000" tIns="0" bIns="0">
+            <a:noAutofit/>
+          </a:bodyPr>
+          <a:lstStyle/>
+          <a:p>
+            <a:pPr indent="0" lvl="0" marL="0" rtl="0" algn="ctr">
+              <a:lnSpc>
+                <a:spcPct val="100000"/>
+              </a:lnSpc>
+              <a:spcBef>
+                <a:spcPts val="0"/>
+              </a:spcBef>
+              <a:spcAft>
+                <a:spcPts val="0"/>
+              </a:spcAft>
+              <a:buNone/>
+            </a:pPr>
+            <a:r>
+              <a:rPr lang="en-US" sz="1800">
+                <a:solidFill>
+                  <a:srgbClr val="444444"/>
+                </a:solidFill>
+              </a:rPr>
+              <a:t>50</a:t>
+            </a:r>
+            <a:endParaRPr/>
+          </a:p>
+        </p:txBody>
+      </p:sp>
+      <p:sp>
+        <p:nvSpPr>
+          <p:cNvPr id="214" name="limits-row-1-bg-0"/>
+          <p:cNvSpPr/>
+          <p:nvPr/>
+        </p:nvSpPr>
+        <p:spPr>
+          <a:xfrm>
+            <a:off x="338325" y="2988500"/>
+            <a:ext cx="5742450" cy="400000"/>
+          </a:xfrm>
+          <a:prstGeom prst="rect">
+            <a:avLst/>
+          </a:prstGeom>
+          <a:solidFill>
+            <a:srgbClr val="FFFFFF"/>
+          </a:solidFill>
+          <a:ln w="9525">
+            <a:solidFill>
+              <a:srgbClr val="E8E8E8"/>
+            </a:solidFill>
+          </a:ln>
+        </p:spPr>
+        <p:txBody>
+          <a:bodyPr/>
+          <a:lstStyle/>
+          <a:p>
+            <a:endParaRPr/>
+          </a:p>
+        </p:txBody>
+      </p:sp>
+      <p:sp>
+        <p:nvSpPr>
+          <p:cNvPr id="215" name="limits-row-1-0"/>
+          <p:cNvSpPr txBox="1"/>
+          <p:nvPr/>
+        </p:nvSpPr>
+        <p:spPr>
+          <a:xfrm>
+            <a:off x="338325" y="2988500"/>
+            <a:ext cx="5742450" cy="400000"/>
+          </a:xfrm>
+          <a:prstGeom prst="rect">
+            <a:avLst/>
+          </a:prstGeom>
+          <a:noFill/>
+          <a:ln>
+            <a:noFill/>
+          </a:ln>
+        </p:spPr>
+        <p:txBody>
+          <a:bodyPr anchor="ctr" anchorCtr="1" wrap="none" lIns="110000" rIns="40000" tIns="0" bIns="0">
+            <a:noAutofit/>
+          </a:bodyPr>
+          <a:lstStyle/>
+          <a:p>
+            <a:pPr indent="0" lvl="0" marL="0" rtl="0" algn="l">
+              <a:lnSpc>
+                <a:spcPct val="100000"/>
+              </a:lnSpc>
+              <a:spcBef>
+                <a:spcPts val="0"/>
+              </a:spcBef>
+              <a:spcAft>
+                <a:spcPts val="0"/>
+              </a:spcAft>
+              <a:buNone/>
+            </a:pPr>
+            <a:r>
+              <a:rPr lang="en-US" sz="1750" b="1">
+                <a:solidFill>
+                  <a:srgbClr val="333333"/>
+                </a:solidFill>
+              </a:rPr>
+              <a:t>Max rows per cursor</a:t>
+            </a:r>
+            <a:endParaRPr/>
+          </a:p>
+        </p:txBody>
+      </p:sp>
+      <p:sp>
+        <p:nvSpPr>
+          <p:cNvPr id="216" name="limits-row-1-bg-1"/>
+          <p:cNvSpPr/>
+          <p:nvPr/>
+        </p:nvSpPr>
+        <p:spPr>
+          <a:xfrm>
+            <a:off x="6080775" y="2988500"/>
+            <a:ext cx="2871225" cy="400000"/>
+          </a:xfrm>
+          <a:prstGeom prst="rect">
+            <a:avLst/>
+          </a:prstGeom>
+          <a:solidFill>
+            <a:srgbClr val="FFFFFF"/>
+          </a:solidFill>
+          <a:ln w="9525">
+            <a:solidFill>
+              <a:srgbClr val="E8E8E8"/>
+            </a:solidFill>
+          </a:ln>
+        </p:spPr>
+        <p:txBody>
+          <a:bodyPr/>
+          <a:lstStyle/>
+          <a:p>
+            <a:endParaRPr/>
+          </a:p>
+        </p:txBody>
+      </p:sp>
+      <p:sp>
+        <p:nvSpPr>
+          <p:cNvPr id="217" name="limits-row-1-1"/>
+          <p:cNvSpPr txBox="1"/>
+          <p:nvPr/>
+        </p:nvSpPr>
+        <p:spPr>
+          <a:xfrm>
+            <a:off x="6080775" y="2988500"/>
+            <a:ext cx="2871225" cy="400000"/>
+          </a:xfrm>
+          <a:prstGeom prst="rect">
+            <a:avLst/>
+          </a:prstGeom>
+          <a:noFill/>
+          <a:ln>
+            <a:noFill/>
+          </a:ln>
+        </p:spPr>
+        <p:txBody>
+          <a:bodyPr anchor="ctr" anchorCtr="1" wrap="none" lIns="40000" rIns="40000" tIns="0" bIns="0">
+            <a:noAutofit/>
+          </a:bodyPr>
+          <a:lstStyle/>
+          <a:p>
+            <a:pPr indent="0" lvl="0" marL="0" rtl="0" algn="ctr">
+              <a:lnSpc>
+                <a:spcPct val="100000"/>
+              </a:lnSpc>
+              <a:spcBef>
+                <a:spcPts val="0"/>
+              </a:spcBef>
+              <a:spcAft>
+                <a:spcPts val="0"/>
+              </a:spcAft>
+              <a:buNone/>
+            </a:pPr>
+            <a:r>
+              <a:rPr lang="en-US" sz="1800">
+                <a:solidFill>
+                  <a:srgbClr val="444444"/>
+                </a:solidFill>
+              </a:rPr>
+              <a:t>100,000</a:t>
+            </a:r>
+            <a:endParaRPr/>
+          </a:p>
+        </p:txBody>
+      </p:sp>
+      <p:sp>
+        <p:nvSpPr>
+          <p:cNvPr id="218" name="limits-row-1-bg-2"/>
+          <p:cNvSpPr/>
+          <p:nvPr/>
+        </p:nvSpPr>
+        <p:spPr>
+          <a:xfrm>
+            <a:off x="8952000" y="2988500"/>
+            <a:ext cx="2871225" cy="400000"/>
+          </a:xfrm>
+          <a:prstGeom prst="rect">
+            <a:avLst/>
+          </a:prstGeom>
+          <a:solidFill>
+            <a:srgbClr val="FFFFFF"/>
+          </a:solidFill>
+          <a:ln w="9525">
+            <a:solidFill>
+              <a:srgbClr val="E8E8E8"/>
+            </a:solidFill>
+          </a:ln>
+        </p:spPr>
+        <p:txBody>
+          <a:bodyPr/>
+          <a:lstStyle/>
+          <a:p>
+            <a:endParaRPr/>
+          </a:p>
+        </p:txBody>
+      </p:sp>
+      <p:sp>
+        <p:nvSpPr>
+          <p:cNvPr id="219" name="limits-row-1-2"/>
+          <p:cNvSpPr txBox="1"/>
+          <p:nvPr/>
+        </p:nvSpPr>
+        <p:spPr>
+          <a:xfrm>
+            <a:off x="8952000" y="2988500"/>
+            <a:ext cx="2871225" cy="400000"/>
+          </a:xfrm>
+          <a:prstGeom prst="rect">
+            <a:avLst/>
+          </a:prstGeom>
+          <a:noFill/>
+          <a:ln>
+            <a:noFill/>
+          </a:ln>
+        </p:spPr>
+        <p:txBody>
+          <a:bodyPr anchor="ctr" anchorCtr="1" wrap="none" lIns="40000" rIns="40000" tIns="0" bIns="0">
+            <a:noAutofit/>
+          </a:bodyPr>
+          <a:lstStyle/>
+          <a:p>
+            <a:pPr indent="0" lvl="0" marL="0" rtl="0" algn="ctr">
+              <a:lnSpc>
+                <a:spcPct val="100000"/>
+              </a:lnSpc>
+              <a:spcBef>
+                <a:spcPts val="0"/>
+              </a:spcBef>
+              <a:spcAft>
+                <a:spcPts val="0"/>
+              </a:spcAft>
+              <a:buNone/>
+            </a:pPr>
+            <a:r>
+              <a:rPr lang="en-US" sz="1800">
+                <a:solidFill>
+                  <a:srgbClr val="444444"/>
+                </a:solidFill>
+              </a:rPr>
+              <a:t>50,000,000</a:t>
+            </a:r>
+            <a:endParaRPr/>
+          </a:p>
+        </p:txBody>
+      </p:sp>
+      <p:sp>
+        <p:nvSpPr>
+          <p:cNvPr id="220" name="limits-row-2-bg-0"/>
+          <p:cNvSpPr/>
+          <p:nvPr/>
+        </p:nvSpPr>
+        <p:spPr>
+          <a:xfrm>
+            <a:off x="338325" y="3388500"/>
+            <a:ext cx="5742450" cy="400000"/>
+          </a:xfrm>
+          <a:prstGeom prst="rect">
+            <a:avLst/>
+          </a:prstGeom>
+          <a:solidFill>
+            <a:srgbClr val="F9FAFC"/>
+          </a:solidFill>
+          <a:ln w="9525">
+            <a:solidFill>
+              <a:srgbClr val="E8E8E8"/>
+            </a:solidFill>
+          </a:ln>
+        </p:spPr>
+        <p:txBody>
+          <a:bodyPr/>
+          <a:lstStyle/>
+          <a:p>
+            <a:endParaRPr/>
+          </a:p>
+        </p:txBody>
+      </p:sp>
+      <p:sp>
+        <p:nvSpPr>
+          <p:cNvPr id="221" name="limits-row-2-0"/>
+          <p:cNvSpPr txBox="1"/>
+          <p:nvPr/>
+        </p:nvSpPr>
+        <p:spPr>
+          <a:xfrm>
+            <a:off x="338325" y="3388500"/>
+            <a:ext cx="5742450" cy="400000"/>
+          </a:xfrm>
+          <a:prstGeom prst="rect">
+            <a:avLst/>
+          </a:prstGeom>
+          <a:noFill/>
+          <a:ln>
+            <a:noFill/>
+          </a:ln>
+        </p:spPr>
+        <p:txBody>
+          <a:bodyPr anchor="ctr" anchorCtr="1" wrap="none" lIns="110000" rIns="40000" tIns="0" bIns="0">
+            <a:noAutofit/>
+          </a:bodyPr>
+          <a:lstStyle/>
+          <a:p>
+            <a:pPr indent="0" lvl="0" marL="0" rtl="0" algn="l">
+              <a:lnSpc>
+                <a:spcPct val="100000"/>
+              </a:lnSpc>
+              <a:spcBef>
+                <a:spcPts val="0"/>
+              </a:spcBef>
+              <a:spcAft>
+                <a:spcPts val="0"/>
+              </a:spcAft>
+              <a:buNone/>
+            </a:pPr>
+            <a:r>
+              <a:rPr lang="en-US" sz="1750" b="1">
+                <a:solidFill>
+                  <a:srgbClr val="333333"/>
+                </a:solidFill>
+              </a:rPr>
+              <a:t>Fetch calls (per transaction)</a:t>
+            </a:r>
+            <a:endParaRPr/>
+          </a:p>
+        </p:txBody>
+      </p:sp>
+      <p:sp>
+        <p:nvSpPr>
+          <p:cNvPr id="222" name="limits-row-2-bg-1"/>
+          <p:cNvSpPr/>
+          <p:nvPr/>
+        </p:nvSpPr>
+        <p:spPr>
+          <a:xfrm>
+            <a:off x="6080775" y="3388500"/>
+            <a:ext cx="2871225" cy="400000"/>
+          </a:xfrm>
+          <a:prstGeom prst="rect">
+            <a:avLst/>
+          </a:prstGeom>
+          <a:solidFill>
+            <a:srgbClr val="F9FAFC"/>
+          </a:solidFill>
+          <a:ln w="9525">
+            <a:solidFill>
+              <a:srgbClr val="E8E8E8"/>
+            </a:solidFill>
+          </a:ln>
+        </p:spPr>
+        <p:txBody>
+          <a:bodyPr/>
+          <a:lstStyle/>
+          <a:p>
+            <a:endParaRPr/>
+          </a:p>
+        </p:txBody>
+      </p:sp>
+      <p:sp>
+        <p:nvSpPr>
+          <p:cNvPr id="223" name="limits-row-2-1"/>
+          <p:cNvSpPr txBox="1"/>
+          <p:nvPr/>
+        </p:nvSpPr>
+        <p:spPr>
+          <a:xfrm>
+            <a:off x="6080775" y="3388500"/>
+            <a:ext cx="2871225" cy="400000"/>
+          </a:xfrm>
+          <a:prstGeom prst="rect">
+            <a:avLst/>
+          </a:prstGeom>
+          <a:noFill/>
+          <a:ln>
+            <a:noFill/>
+          </a:ln>
+        </p:spPr>
+        <p:txBody>
+          <a:bodyPr anchor="ctr" anchorCtr="1" wrap="none" lIns="40000" rIns="40000" tIns="0" bIns="0">
+            <a:noAutofit/>
+          </a:bodyPr>
+          <a:lstStyle/>
+          <a:p>
+            <a:pPr indent="0" lvl="0" marL="0" rtl="0" algn="ctr">
+              <a:lnSpc>
+                <a:spcPct val="100000"/>
+              </a:lnSpc>
+              <a:spcBef>
+                <a:spcPts val="0"/>
+              </a:spcBef>
+              <a:spcAft>
+                <a:spcPts val="0"/>
+              </a:spcAft>
+              <a:buNone/>
+            </a:pPr>
+            <a:r>
+              <a:rPr lang="en-US" sz="1800">
+                <a:solidFill>
+                  <a:srgbClr val="444444"/>
+                </a:solidFill>
+              </a:rPr>
+              <a:t>100</a:t>
+            </a:r>
+            <a:endParaRPr/>
+          </a:p>
+        </p:txBody>
+      </p:sp>
+      <p:sp>
+        <p:nvSpPr>
+          <p:cNvPr id="224" name="limits-row-2-bg-2"/>
+          <p:cNvSpPr/>
+          <p:nvPr/>
+        </p:nvSpPr>
+        <p:spPr>
+          <a:xfrm>
+            <a:off x="8952000" y="3388500"/>
+            <a:ext cx="2871225" cy="400000"/>
+          </a:xfrm>
+          <a:prstGeom prst="rect">
+            <a:avLst/>
+          </a:prstGeom>
+          <a:solidFill>
+            <a:srgbClr val="F9FAFC"/>
+          </a:solidFill>
+          <a:ln w="9525">
+            <a:solidFill>
+              <a:srgbClr val="E8E8E8"/>
+            </a:solidFill>
+          </a:ln>
+        </p:spPr>
+        <p:txBody>
+          <a:bodyPr/>
+          <a:lstStyle/>
+          <a:p>
+            <a:endParaRPr/>
+          </a:p>
+        </p:txBody>
+      </p:sp>
+      <p:sp>
+        <p:nvSpPr>
+          <p:cNvPr id="225" name="limits-row-2-2"/>
+          <p:cNvSpPr txBox="1"/>
+          <p:nvPr/>
+        </p:nvSpPr>
+        <p:spPr>
+          <a:xfrm>
+            <a:off x="8952000" y="3388500"/>
+            <a:ext cx="2871225" cy="400000"/>
+          </a:xfrm>
+          <a:prstGeom prst="rect">
+            <a:avLst/>
+          </a:prstGeom>
+          <a:noFill/>
+          <a:ln>
+            <a:noFill/>
+          </a:ln>
+        </p:spPr>
+        <p:txBody>
+          <a:bodyPr anchor="ctr" anchorCtr="1" wrap="none" lIns="40000" rIns="40000" tIns="0" bIns="0">
+            <a:noAutofit/>
+          </a:bodyPr>
+          <a:lstStyle/>
+          <a:p>
+            <a:pPr indent="0" lvl="0" marL="0" rtl="0" algn="ctr">
+              <a:lnSpc>
+                <a:spcPct val="100000"/>
+              </a:lnSpc>
+              <a:spcBef>
+                <a:spcPts val="0"/>
+              </a:spcBef>
+              <a:spcAft>
+                <a:spcPts val="0"/>
+              </a:spcAft>
+              <a:buNone/>
+            </a:pPr>
+            <a:r>
+              <a:rPr lang="en-US" sz="1800">
+                <a:solidFill>
+                  <a:srgbClr val="444444"/>
+                </a:solidFill>
+              </a:rPr>
+              <a:t>100</a:t>
+            </a:r>
+            <a:endParaRPr/>
+          </a:p>
+        </p:txBody>
+      </p:sp>
+      <p:sp>
+        <p:nvSpPr>
+          <p:cNvPr id="226" name="limits-row-3-bg-0"/>
+          <p:cNvSpPr/>
+          <p:nvPr/>
+        </p:nvSpPr>
+        <p:spPr>
+          <a:xfrm>
+            <a:off x="338325" y="3788500"/>
+            <a:ext cx="5742450" cy="400000"/>
+          </a:xfrm>
+          <a:prstGeom prst="rect">
+            <a:avLst/>
+          </a:prstGeom>
+          <a:solidFill>
+            <a:srgbClr val="FFFFFF"/>
+          </a:solidFill>
+          <a:ln w="9525">
+            <a:solidFill>
+              <a:srgbClr val="E8E8E8"/>
+            </a:solidFill>
+          </a:ln>
+        </p:spPr>
+        <p:txBody>
+          <a:bodyPr/>
+          <a:lstStyle/>
+          <a:p>
+            <a:endParaRPr/>
+          </a:p>
+        </p:txBody>
+      </p:sp>
+      <p:sp>
+        <p:nvSpPr>
+          <p:cNvPr id="227" name="limits-row-3-0"/>
+          <p:cNvSpPr txBox="1"/>
+          <p:nvPr/>
+        </p:nvSpPr>
+        <p:spPr>
+          <a:xfrm>
+            <a:off x="338325" y="3788500"/>
+            <a:ext cx="5742450" cy="400000"/>
+          </a:xfrm>
+          <a:prstGeom prst="rect">
+            <a:avLst/>
+          </a:prstGeom>
+          <a:noFill/>
+          <a:ln>
+            <a:noFill/>
+          </a:ln>
+        </p:spPr>
+        <p:txBody>
+          <a:bodyPr anchor="ctr" anchorCtr="1" wrap="none" lIns="110000" rIns="40000" tIns="0" bIns="0">
+            <a:noAutofit/>
+          </a:bodyPr>
+          <a:lstStyle/>
+          <a:p>
+            <a:pPr indent="0" lvl="0" marL="0" rtl="0" algn="l">
+              <a:lnSpc>
+                <a:spcPct val="100000"/>
+              </a:lnSpc>
+              <a:spcBef>
+                <a:spcPts val="0"/>
+              </a:spcBef>
+              <a:spcAft>
+                <a:spcPts val="0"/>
+              </a:spcAft>
+              <a:buNone/>
+            </a:pPr>
+            <a:r>
+              <a:rPr lang="en-US" sz="1750" b="1">
+                <a:solidFill>
+                  <a:srgbClr val="333333"/>
+                </a:solidFill>
+              </a:rPr>
+              <a:t>Daily cursors (per org)</a:t>
+            </a:r>
+            <a:endParaRPr/>
+          </a:p>
+        </p:txBody>
+      </p:sp>
+      <p:sp>
+        <p:nvSpPr>
+          <p:cNvPr id="228" name="limits-row-3-bg-1"/>
+          <p:cNvSpPr/>
+          <p:nvPr/>
+        </p:nvSpPr>
+        <p:spPr>
+          <a:xfrm>
+            <a:off x="6080775" y="3788500"/>
+            <a:ext cx="2871225" cy="400000"/>
+          </a:xfrm>
+          <a:prstGeom prst="rect">
+            <a:avLst/>
+          </a:prstGeom>
+          <a:solidFill>
+            <a:srgbClr val="FFFFFF"/>
+          </a:solidFill>
+          <a:ln w="9525">
+            <a:solidFill>
+              <a:srgbClr val="E8E8E8"/>
+            </a:solidFill>
+          </a:ln>
+        </p:spPr>
+        <p:txBody>
+          <a:bodyPr/>
+          <a:lstStyle/>
+          <a:p>
+            <a:endParaRPr/>
+          </a:p>
+        </p:txBody>
+      </p:sp>
+      <p:sp>
+        <p:nvSpPr>
+          <p:cNvPr id="229" name="limits-row-3-1"/>
+          <p:cNvSpPr txBox="1"/>
+          <p:nvPr/>
+        </p:nvSpPr>
+        <p:spPr>
+          <a:xfrm>
+            <a:off x="6080775" y="3788500"/>
+            <a:ext cx="2871225" cy="400000"/>
+          </a:xfrm>
+          <a:prstGeom prst="rect">
+            <a:avLst/>
+          </a:prstGeom>
+          <a:noFill/>
+          <a:ln>
+            <a:noFill/>
+          </a:ln>
+        </p:spPr>
+        <p:txBody>
+          <a:bodyPr anchor="ctr" anchorCtr="1" wrap="none" lIns="40000" rIns="40000" tIns="0" bIns="0">
+            <a:noAutofit/>
+          </a:bodyPr>
+          <a:lstStyle/>
+          <a:p>
+            <a:pPr indent="0" lvl="0" marL="0" rtl="0" algn="ctr">
+              <a:lnSpc>
+                <a:spcPct val="100000"/>
+              </a:lnSpc>
+              <a:spcBef>
+                <a:spcPts val="0"/>
+              </a:spcBef>
+              <a:spcAft>
+                <a:spcPts val="0"/>
+              </a:spcAft>
+              <a:buNone/>
+            </a:pPr>
+            <a:r>
+              <a:rPr lang="en-US" sz="1800">
+                <a:solidFill>
+                  <a:srgbClr val="444444"/>
+                </a:solidFill>
+              </a:rPr>
+              <a:t>200,000</a:t>
+            </a:r>
+            <a:endParaRPr/>
+          </a:p>
+        </p:txBody>
+      </p:sp>
+      <p:sp>
+        <p:nvSpPr>
+          <p:cNvPr id="230" name="limits-row-3-bg-2"/>
+          <p:cNvSpPr/>
+          <p:nvPr/>
+        </p:nvSpPr>
+        <p:spPr>
+          <a:xfrm>
+            <a:off x="8952000" y="3788500"/>
+            <a:ext cx="2871225" cy="400000"/>
+          </a:xfrm>
+          <a:prstGeom prst="rect">
+            <a:avLst/>
+          </a:prstGeom>
+          <a:solidFill>
+            <a:srgbClr val="FFFFFF"/>
+          </a:solidFill>
+          <a:ln w="9525">
+            <a:solidFill>
+              <a:srgbClr val="E8E8E8"/>
+            </a:solidFill>
+          </a:ln>
+        </p:spPr>
+        <p:txBody>
+          <a:bodyPr/>
+          <a:lstStyle/>
+          <a:p>
+            <a:endParaRPr/>
+          </a:p>
+        </p:txBody>
+      </p:sp>
+      <p:sp>
+        <p:nvSpPr>
+          <p:cNvPr id="231" name="limits-row-3-2"/>
+          <p:cNvSpPr txBox="1"/>
+          <p:nvPr/>
+        </p:nvSpPr>
+        <p:spPr>
+          <a:xfrm>
+            <a:off x="8952000" y="3788500"/>
+            <a:ext cx="2871225" cy="400000"/>
+          </a:xfrm>
+          <a:prstGeom prst="rect">
+            <a:avLst/>
+          </a:prstGeom>
+          <a:noFill/>
+          <a:ln>
+            <a:noFill/>
+          </a:ln>
+        </p:spPr>
+        <p:txBody>
+          <a:bodyPr anchor="ctr" anchorCtr="1" wrap="none" lIns="40000" rIns="40000" tIns="0" bIns="0">
+            <a:noAutofit/>
+          </a:bodyPr>
+          <a:lstStyle/>
+          <a:p>
+            <a:pPr indent="0" lvl="0" marL="0" rtl="0" algn="ctr">
+              <a:lnSpc>
+                <a:spcPct val="100000"/>
+              </a:lnSpc>
+              <a:spcBef>
+                <a:spcPts val="0"/>
+              </a:spcBef>
+              <a:spcAft>
+                <a:spcPts val="0"/>
+              </a:spcAft>
+              <a:buNone/>
+            </a:pPr>
+            <a:r>
+              <a:rPr lang="en-US" sz="1800">
+                <a:solidFill>
+                  <a:srgbClr val="444444"/>
+                </a:solidFill>
+              </a:rPr>
+              <a:t>10,000</a:t>
+            </a:r>
+            <a:endParaRPr/>
+          </a:p>
+        </p:txBody>
+      </p:sp>
+      <p:sp>
+        <p:nvSpPr>
+          <p:cNvPr id="232" name="limits-row-4-bg-0"/>
+          <p:cNvSpPr/>
+          <p:nvPr/>
+        </p:nvSpPr>
+        <p:spPr>
+          <a:xfrm>
+            <a:off x="338325" y="4188500"/>
+            <a:ext cx="5742450" cy="400000"/>
+          </a:xfrm>
+          <a:prstGeom prst="rect">
+            <a:avLst/>
+          </a:prstGeom>
+          <a:solidFill>
+            <a:srgbClr val="F9FAFC"/>
+          </a:solidFill>
+          <a:ln w="9525">
+            <a:solidFill>
+              <a:srgbClr val="E8E8E8"/>
+            </a:solidFill>
+          </a:ln>
+        </p:spPr>
+        <p:txBody>
+          <a:bodyPr/>
+          <a:lstStyle/>
+          <a:p>
+            <a:endParaRPr/>
+          </a:p>
+        </p:txBody>
+      </p:sp>
+      <p:sp>
+        <p:nvSpPr>
+          <p:cNvPr id="233" name="limits-row-4-0"/>
+          <p:cNvSpPr txBox="1"/>
+          <p:nvPr/>
+        </p:nvSpPr>
+        <p:spPr>
+          <a:xfrm>
+            <a:off x="338325" y="4188500"/>
+            <a:ext cx="5742450" cy="400000"/>
+          </a:xfrm>
+          <a:prstGeom prst="rect">
+            <a:avLst/>
+          </a:prstGeom>
+          <a:noFill/>
+          <a:ln>
+            <a:noFill/>
+          </a:ln>
+        </p:spPr>
+        <p:txBody>
+          <a:bodyPr anchor="ctr" anchorCtr="1" wrap="none" lIns="110000" rIns="40000" tIns="0" bIns="0">
+            <a:noAutofit/>
+          </a:bodyPr>
+          <a:lstStyle/>
+          <a:p>
+            <a:pPr indent="0" lvl="0" marL="0" rtl="0" algn="l">
+              <a:lnSpc>
+                <a:spcPct val="100000"/>
+              </a:lnSpc>
+              <a:spcBef>
+                <a:spcPts val="0"/>
+              </a:spcBef>
+              <a:spcAft>
+                <a:spcPts val="0"/>
+              </a:spcAft>
+              <a:buNone/>
+            </a:pPr>
+            <a:r>
+              <a:rPr lang="en-US" sz="1750" b="1">
+                <a:solidFill>
+                  <a:srgbClr val="333333"/>
+                </a:solidFill>
+              </a:rPr>
+              <a:t>Daily cursor rows (per org)</a:t>
+            </a:r>
+            <a:endParaRPr/>
+          </a:p>
+        </p:txBody>
+      </p:sp>
+      <p:sp>
+        <p:nvSpPr>
+          <p:cNvPr id="234" name="limits-row-4-bg-1"/>
+          <p:cNvSpPr/>
+          <p:nvPr/>
+        </p:nvSpPr>
+        <p:spPr>
+          <a:xfrm>
+            <a:off x="6080775" y="4188500"/>
+            <a:ext cx="2871225" cy="400000"/>
+          </a:xfrm>
+          <a:prstGeom prst="rect">
+            <a:avLst/>
+          </a:prstGeom>
+          <a:solidFill>
+            <a:srgbClr val="F9FAFC"/>
+          </a:solidFill>
+          <a:ln w="9525">
+            <a:solidFill>
+              <a:srgbClr val="E8E8E8"/>
+            </a:solidFill>
+          </a:ln>
+        </p:spPr>
+        <p:txBody>
+          <a:bodyPr/>
+          <a:lstStyle/>
+          <a:p>
+            <a:endParaRPr/>
+          </a:p>
+        </p:txBody>
+      </p:sp>
+      <p:sp>
+        <p:nvSpPr>
+          <p:cNvPr id="235" name="limits-row-4-1"/>
+          <p:cNvSpPr txBox="1"/>
+          <p:nvPr/>
+        </p:nvSpPr>
+        <p:spPr>
+          <a:xfrm>
+            <a:off x="6080775" y="4188500"/>
+            <a:ext cx="2871225" cy="400000"/>
+          </a:xfrm>
+          <a:prstGeom prst="rect">
+            <a:avLst/>
+          </a:prstGeom>
+          <a:noFill/>
+          <a:ln>
+            <a:noFill/>
+          </a:ln>
+        </p:spPr>
+        <p:txBody>
+          <a:bodyPr anchor="ctr" anchorCtr="1" wrap="none" lIns="40000" rIns="40000" tIns="0" bIns="0">
+            <a:noAutofit/>
+          </a:bodyPr>
+          <a:lstStyle/>
+          <a:p>
+            <a:pPr indent="0" lvl="0" marL="0" rtl="0" algn="ctr">
+              <a:lnSpc>
+                <a:spcPct val="100000"/>
+              </a:lnSpc>
+              <a:spcBef>
+                <a:spcPts val="0"/>
+              </a:spcBef>
+              <a:spcAft>
+                <a:spcPts val="0"/>
+              </a:spcAft>
+              <a:buNone/>
+            </a:pPr>
+            <a:r>
+              <a:rPr lang="en-US" sz="1800">
+                <a:solidFill>
+                  <a:srgbClr val="444444"/>
+                </a:solidFill>
+              </a:rPr>
+              <a:t>1,000,000,000</a:t>
+            </a:r>
+            <a:endParaRPr/>
+          </a:p>
+        </p:txBody>
+      </p:sp>
+      <p:sp>
+        <p:nvSpPr>
+          <p:cNvPr id="236" name="limits-row-4-bg-2"/>
+          <p:cNvSpPr/>
+          <p:nvPr/>
+        </p:nvSpPr>
+        <p:spPr>
+          <a:xfrm>
+            <a:off x="8952000" y="4188500"/>
+            <a:ext cx="2871225" cy="400000"/>
+          </a:xfrm>
+          <a:prstGeom prst="rect">
+            <a:avLst/>
+          </a:prstGeom>
+          <a:solidFill>
+            <a:srgbClr val="F9FAFC"/>
+          </a:solidFill>
+          <a:ln w="9525">
+            <a:solidFill>
+              <a:srgbClr val="E8E8E8"/>
+            </a:solidFill>
+          </a:ln>
+        </p:spPr>
+        <p:txBody>
+          <a:bodyPr/>
+          <a:lstStyle/>
+          <a:p>
+            <a:endParaRPr/>
+          </a:p>
+        </p:txBody>
+      </p:sp>
+      <p:sp>
+        <p:nvSpPr>
+          <p:cNvPr id="237" name="limits-row-4-2"/>
+          <p:cNvSpPr txBox="1"/>
+          <p:nvPr/>
+        </p:nvSpPr>
+        <p:spPr>
+          <a:xfrm>
+            <a:off x="8952000" y="4188500"/>
+            <a:ext cx="2871225" cy="400000"/>
+          </a:xfrm>
+          <a:prstGeom prst="rect">
+            <a:avLst/>
+          </a:prstGeom>
+          <a:noFill/>
+          <a:ln>
+            <a:noFill/>
+          </a:ln>
+        </p:spPr>
+        <p:txBody>
+          <a:bodyPr anchor="ctr" anchorCtr="1" wrap="none" lIns="40000" rIns="40000" tIns="0" bIns="0">
+            <a:noAutofit/>
+          </a:bodyPr>
+          <a:lstStyle/>
+          <a:p>
+            <a:pPr indent="0" lvl="0" marL="0" rtl="0" algn="ctr">
+              <a:lnSpc>
+                <a:spcPct val="100000"/>
+              </a:lnSpc>
+              <a:spcBef>
+                <a:spcPts val="0"/>
+              </a:spcBef>
+              <a:spcAft>
+                <a:spcPts val="0"/>
+              </a:spcAft>
+              <a:buNone/>
+            </a:pPr>
+            <a:r>
+              <a:rPr lang="en-US" sz="1800">
+                <a:solidFill>
+                  <a:srgbClr val="444444"/>
+                </a:solidFill>
+              </a:rPr>
+              <a:t>1,000,000,000</a:t>
+            </a:r>
+            <a:endParaRPr/>
+          </a:p>
+        </p:txBody>
+      </p:sp>
+      <p:sp>
+        <p:nvSpPr>
+          <p:cNvPr id="239" name="limits-info-panel"/>
+          <p:cNvSpPr txBox="1"/>
+          <p:nvPr/>
+        </p:nvSpPr>
+        <p:spPr>
+          <a:xfrm>
+            <a:off x="338325" y="4698500"/>
+            <a:ext cx="11484900" cy="900000"/>
+          </a:xfrm>
+          <a:prstGeom prst="roundRect">
+            <a:avLst>
+              <a:gd name="adj" fmla="val 6000"/>
+            </a:avLst>
+          </a:prstGeom>
+          <a:solidFill>
+            <a:srgbClr val="F4F7FC"/>
+          </a:solidFill>
+          <a:ln>
+            <a:noFill/>
+          </a:ln>
+          <a:effectLst>
+            <a:outerShdw blurRad="50800" dist="31750" dir="2700000" algn="ctr" rotWithShape="0">
+              <a:srgbClr val="000000">
+                <a:alpha val="28000"/>
+              </a:srgbClr>
+            </a:outerShdw>
+          </a:effectLst>
+        </p:spPr>
+        <p:txBody>
+          <a:bodyPr anchor="t" anchorCtr="0" wrap="square" lIns="130000" rIns="110000" tIns="110000" bIns="110000">
+            <a:noAutofit/>
+          </a:bodyPr>
+          <a:lstStyle/>
+          <a:p>
+            <a:pPr indent="-285750" lvl="0" marL="457200" rtl="0" algn="l">
+              <a:lnSpc>
+                <a:spcPct val="115000"/>
+              </a:lnSpc>
+              <a:spcBef>
+                <a:spcPts val="320"/>
+              </a:spcBef>
+              <a:spcAft>
+                <a:spcPts val="0"/>
+              </a:spcAft>
+              <a:buClr>
+                <a:srgbClr val="891019"/>
+              </a:buClr>
+              <a:buSzPts val="1600"/>
+              <a:buChar char="•"/>
+            </a:pPr>
+            <a:r>
+              <a:rPr lang="en-US" sz="1750"/>
+              <a:t>Max rows per cursor caps each cursor's result set size — not a per-transaction row governor.</a:t>
+            </a:r>
+            <a:endParaRPr/>
+          </a:p>
+          <a:p>
+            <a:pPr indent="-285750" lvl="0" marL="457200" rtl="0" algn="l">
+              <a:lnSpc>
+                <a:spcPct val="115000"/>
+              </a:lnSpc>
+              <a:spcBef>
+                <a:spcPts val="200"/>
+              </a:spcBef>
+              <a:spcAft>
+                <a:spcPts val="0"/>
+              </a:spcAft>
+              <a:buClr>
+                <a:srgbClr val="891019"/>
+              </a:buClr>
+              <a:buSzPts val="1600"/>
+              <a:buChar char="•"/>
+            </a:pPr>
+            <a:r>
+              <a:rPr lang="en-US" sz="1750"/>
+              <a:t>Fetch calls are shared: Cursor.fetch and PaginationCursor.fetchPage both count toward the 100-call limit.</a:t>
             </a:r>
             <a:endParaRPr/>
           </a:p>
@@ -15186,16 +17504,52 @@
       </p:grpSpPr>
       <p:sp>
         <p:nvSpPr>
-          <p:cNvPr id="115" name="Google Shape;115;p14"/>
+          <p:cNvPr id="201" name="tip-card-bg-201"/>
+          <p:cNvSpPr/>
+          <p:nvPr/>
+        </p:nvSpPr>
+        <p:spPr>
+          <a:xfrm>
+            <a:off x="338325" y="2116500"/>
+            <a:ext cx="5662450" cy="1120000"/>
+          </a:xfrm>
+          <a:prstGeom prst="roundRect">
+            <a:avLst>
+              <a:gd name="adj" fmla="val 8000"/>
+            </a:avLst>
+          </a:prstGeom>
+          <a:solidFill>
+            <a:srgbClr val="F4F7FC"/>
+          </a:solidFill>
+          <a:ln>
+            <a:noFill/>
+          </a:ln>
+          <a:effectLst>
+            <a:outerShdw blurRad="50800" dist="31750" dir="2700000" algn="ctr" rotWithShape="0">
+              <a:srgbClr val="000000">
+                <a:alpha val="28000"/>
+              </a:srgbClr>
+            </a:outerShdw>
+          </a:effectLst>
+        </p:spPr>
+        <p:txBody>
+          <a:bodyPr/>
+          <a:lstStyle/>
+          <a:p>
+            <a:endParaRPr/>
+          </a:p>
+        </p:txBody>
+      </p:sp>
+      <p:sp>
+        <p:nvSpPr>
+          <p:cNvPr id="202" name="tip-emoji-202"/>
           <p:cNvSpPr txBox="1"/>
-          <p:nvPr>
-            <p:ph idx="1" type="body"/>
-          </p:nvPr>
+          <p:nvPr/>
         </p:nvSpPr>
         <p:spPr>
           <a:xfrm>
-            <a:off x="338325" y="1020943"/>
-            <a:ext cx="11484900" cy="5257200"/>
+            <a:off x="428325" y="2506500"/>
+            <a:ext cx="340000" cy="340000"/>
           </a:xfrm>
           <a:prstGeom prst="rect">
             <a:avLst/>
@@ -15206,27 +17560,859 @@
           </a:ln>
         </p:spPr>
         <p:txBody>
-          <a:bodyPr anchorCtr="0" anchor="t" bIns="0" lIns="9125" spcFirstLastPara="1" rIns="0" wrap="square" tIns="0">
+          <a:bodyPr anchor="ctr" anchorCtr="1" wrap="none">
             <a:noAutofit/>
           </a:bodyPr>
           <a:lstStyle/>
           <a:p>
-            <a:pPr indent="0" lvl="0" marL="0" rtl="0" algn="l">
-              <a:lnSpc>
-                <a:spcPct val="100000"/>
-              </a:lnSpc>
-              <a:spcBef>
-                <a:spcPts val="0"/>
-              </a:spcBef>
-              <a:spcAft>
-                <a:spcPts val="0"/>
-              </a:spcAft>
-              <a:buSzPts val="2400"/>
+            <a:pPr algn="ctr">
               <a:buNone/>
             </a:pPr>
             <a:r>
-              <a:rPr lang="en-US"/>
-              <a:t/>
+              <a:rPr lang="en-US" sz="3200"/>
+              <a:t>🔍</a:t>
+            </a:r>
+            <a:endParaRPr/>
+          </a:p>
+        </p:txBody>
+      </p:sp>
+      <p:sp>
+        <p:nvSpPr>
+          <p:cNvPr id="203" name="tip-content-203"/>
+          <p:cNvSpPr txBox="1"/>
+          <p:nvPr/>
+        </p:nvSpPr>
+        <p:spPr>
+          <a:xfrm>
+            <a:off x="858325" y="2201500"/>
+            <a:ext cx="5057450" cy="950000"/>
+          </a:xfrm>
+          <a:prstGeom prst="rect">
+            <a:avLst/>
+          </a:prstGeom>
+          <a:noFill/>
+          <a:ln>
+            <a:noFill/>
+          </a:ln>
+        </p:spPr>
+        <p:txBody>
+          <a:bodyPr anchor="t" anchorCtr="0" wrap="square" lIns="27432" rIns="27432" tIns="0" bIns="0">
+            <a:noAutofit/>
+          </a:bodyPr>
+          <a:lstStyle/>
+          <a:p>
+            <a:pPr marL="0" indent="0" algn="l">
+              <a:lnSpc>
+                <a:spcPct val="105000"/>
+              </a:lnSpc>
+              <a:spcBef>
+                <a:spcPts val="0"/>
+              </a:spcBef>
+              <a:spcAft>
+                <a:spcPts val="80"/>
+              </a:spcAft>
+              <a:buNone/>
+            </a:pPr>
+            <a:r>
+              <a:rPr lang="en-US" sz="1650" b="1">
+                <a:solidFill>
+                  <a:srgbClr val="4A6FA5"/>
+                </a:solidFill>
+              </a:rPr>
+              <a:t>Instrument limits first</a:t>
+            </a:r>
+            <a:endParaRPr/>
+          </a:p>
+          <a:p>
+            <a:pPr marL="0" indent="0" algn="l">
+              <a:lnSpc>
+                <a:spcPct val="115000"/>
+              </a:lnSpc>
+              <a:spcBef>
+                <a:spcPts val="0"/>
+              </a:spcBef>
+              <a:spcAft>
+                <a:spcPts val="0"/>
+              </a:spcAft>
+              <a:buNone/>
+            </a:pPr>
+            <a:r>
+              <a:rPr lang="en-US" sz="1500">
+                <a:solidFill>
+                  <a:srgbClr val="444444"/>
+                </a:solidFill>
+              </a:rPr>
+              <a:t>Show cursor, fetch, and row limits in the UI before users hit governor walls.</a:t>
+            </a:r>
+            <a:endParaRPr/>
+          </a:p>
+        </p:txBody>
+      </p:sp>
+      <p:sp>
+        <p:nvSpPr>
+          <p:cNvPr id="204" name="tip-card-bg-204"/>
+          <p:cNvSpPr/>
+          <p:nvPr/>
+        </p:nvSpPr>
+        <p:spPr>
+          <a:xfrm>
+            <a:off x="6160775" y="2116500"/>
+            <a:ext cx="5662450" cy="1120000"/>
+          </a:xfrm>
+          <a:prstGeom prst="roundRect">
+            <a:avLst>
+              <a:gd name="adj" fmla="val 8000"/>
+            </a:avLst>
+          </a:prstGeom>
+          <a:solidFill>
+            <a:srgbClr val="F3FAF4"/>
+          </a:solidFill>
+          <a:ln>
+            <a:noFill/>
+          </a:ln>
+          <a:effectLst>
+            <a:outerShdw blurRad="50800" dist="31750" dir="2700000" algn="ctr" rotWithShape="0">
+              <a:srgbClr val="000000">
+                <a:alpha val="28000"/>
+              </a:srgbClr>
+            </a:outerShdw>
+          </a:effectLst>
+        </p:spPr>
+        <p:txBody>
+          <a:bodyPr/>
+          <a:lstStyle/>
+          <a:p>
+            <a:endParaRPr/>
+          </a:p>
+        </p:txBody>
+      </p:sp>
+      <p:sp>
+        <p:nvSpPr>
+          <p:cNvPr id="205" name="tip-emoji-205"/>
+          <p:cNvSpPr txBox="1"/>
+          <p:nvPr/>
+        </p:nvSpPr>
+        <p:spPr>
+          <a:xfrm>
+            <a:off x="6250775" y="2506500"/>
+            <a:ext cx="340000" cy="340000"/>
+          </a:xfrm>
+          <a:prstGeom prst="rect">
+            <a:avLst/>
+          </a:prstGeom>
+          <a:noFill/>
+          <a:ln>
+            <a:noFill/>
+          </a:ln>
+        </p:spPr>
+        <p:txBody>
+          <a:bodyPr anchor="ctr" anchorCtr="1" wrap="none">
+            <a:noAutofit/>
+          </a:bodyPr>
+          <a:lstStyle/>
+          <a:p>
+            <a:pPr algn="ctr">
+              <a:buNone/>
+            </a:pPr>
+            <a:r>
+              <a:rPr lang="en-US" sz="3200"/>
+              <a:t>📦</a:t>
+            </a:r>
+            <a:endParaRPr/>
+          </a:p>
+        </p:txBody>
+      </p:sp>
+      <p:sp>
+        <p:nvSpPr>
+          <p:cNvPr id="206" name="tip-content-206"/>
+          <p:cNvSpPr txBox="1"/>
+          <p:nvPr/>
+        </p:nvSpPr>
+        <p:spPr>
+          <a:xfrm>
+            <a:off x="6680775" y="2201500"/>
+            <a:ext cx="5057450" cy="950000"/>
+          </a:xfrm>
+          <a:prstGeom prst="rect">
+            <a:avLst/>
+          </a:prstGeom>
+          <a:noFill/>
+          <a:ln>
+            <a:noFill/>
+          </a:ln>
+        </p:spPr>
+        <p:txBody>
+          <a:bodyPr anchor="t" anchorCtr="0" wrap="square" lIns="27432" rIns="27432" tIns="0" bIns="0">
+            <a:noAutofit/>
+          </a:bodyPr>
+          <a:lstStyle/>
+          <a:p>
+            <a:pPr marL="0" indent="0" algn="l">
+              <a:lnSpc>
+                <a:spcPct val="105000"/>
+              </a:lnSpc>
+              <a:spcBef>
+                <a:spcPts val="0"/>
+              </a:spcBef>
+              <a:spcAft>
+                <a:spcPts val="80"/>
+              </a:spcAft>
+              <a:buNone/>
+            </a:pPr>
+            <a:r>
+              <a:rPr lang="en-US" sz="1650" b="1">
+                <a:solidFill>
+                  <a:srgbClr val="5A7A3A"/>
+                </a:solidFill>
+              </a:rPr>
+              <a:t>Session cache vs LWC state</a:t>
+            </a:r>
+            <a:endParaRPr/>
+          </a:p>
+          <a:p>
+            <a:pPr marL="0" indent="0" algn="l">
+              <a:lnSpc>
+                <a:spcPct val="115000"/>
+              </a:lnSpc>
+              <a:spcBef>
+                <a:spcPts val="0"/>
+              </a:spcBef>
+              <a:spcAft>
+                <a:spcPts val="0"/>
+              </a:spcAft>
+              <a:buNone/>
+            </a:pPr>
+            <a:r>
+              <a:rPr lang="en-US" sz="1500">
+                <a:solidFill>
+                  <a:srgbClr val="444444"/>
+                </a:solidFill>
+              </a:rPr>
+              <a:t>Cache.Session survives Apex calls; LWC-held cursor avoids server-side state.</a:t>
+            </a:r>
+            <a:endParaRPr/>
+          </a:p>
+        </p:txBody>
+      </p:sp>
+      <p:sp>
+        <p:nvSpPr>
+          <p:cNvPr id="207" name="tip-card-bg-207"/>
+          <p:cNvSpPr/>
+          <p:nvPr/>
+        </p:nvSpPr>
+        <p:spPr>
+          <a:xfrm>
+            <a:off x="338325" y="3366500"/>
+            <a:ext cx="5662450" cy="1120000"/>
+          </a:xfrm>
+          <a:prstGeom prst="roundRect">
+            <a:avLst>
+              <a:gd name="adj" fmla="val 8000"/>
+            </a:avLst>
+          </a:prstGeom>
+          <a:solidFill>
+            <a:srgbClr val="FFF9F2"/>
+          </a:solidFill>
+          <a:ln>
+            <a:noFill/>
+          </a:ln>
+          <a:effectLst>
+            <a:outerShdw blurRad="50800" dist="31750" dir="2700000" algn="ctr" rotWithShape="0">
+              <a:srgbClr val="000000">
+                <a:alpha val="28000"/>
+              </a:srgbClr>
+            </a:outerShdw>
+          </a:effectLst>
+        </p:spPr>
+        <p:txBody>
+          <a:bodyPr/>
+          <a:lstStyle/>
+          <a:p>
+            <a:endParaRPr/>
+          </a:p>
+        </p:txBody>
+      </p:sp>
+      <p:sp>
+        <p:nvSpPr>
+          <p:cNvPr id="208" name="tip-emoji-208"/>
+          <p:cNvSpPr txBox="1"/>
+          <p:nvPr/>
+        </p:nvSpPr>
+        <p:spPr>
+          <a:xfrm>
+            <a:off x="428325" y="3756500"/>
+            <a:ext cx="340000" cy="340000"/>
+          </a:xfrm>
+          <a:prstGeom prst="rect">
+            <a:avLst/>
+          </a:prstGeom>
+          <a:noFill/>
+          <a:ln>
+            <a:noFill/>
+          </a:ln>
+        </p:spPr>
+        <p:txBody>
+          <a:bodyPr anchor="ctr" anchorCtr="1" wrap="none">
+            <a:noAutofit/>
+          </a:bodyPr>
+          <a:lstStyle/>
+          <a:p>
+            <a:pPr algn="ctr">
+              <a:buNone/>
+            </a:pPr>
+            <a:r>
+              <a:rPr lang="en-US" sz="3200"/>
+              <a:t>📄</a:t>
+            </a:r>
+            <a:endParaRPr/>
+          </a:p>
+        </p:txBody>
+      </p:sp>
+      <p:sp>
+        <p:nvSpPr>
+          <p:cNvPr id="209" name="tip-content-209"/>
+          <p:cNvSpPr txBox="1"/>
+          <p:nvPr/>
+        </p:nvSpPr>
+        <p:spPr>
+          <a:xfrm>
+            <a:off x="858325" y="3451500"/>
+            <a:ext cx="5057450" cy="950000"/>
+          </a:xfrm>
+          <a:prstGeom prst="rect">
+            <a:avLst/>
+          </a:prstGeom>
+          <a:noFill/>
+          <a:ln>
+            <a:noFill/>
+          </a:ln>
+        </p:spPr>
+        <p:txBody>
+          <a:bodyPr anchor="t" anchorCtr="0" wrap="square" lIns="27432" rIns="27432" tIns="0" bIns="0">
+            <a:noAutofit/>
+          </a:bodyPr>
+          <a:lstStyle/>
+          <a:p>
+            <a:pPr marL="0" indent="0" algn="l">
+              <a:lnSpc>
+                <a:spcPct val="105000"/>
+              </a:lnSpc>
+              <a:spcBef>
+                <a:spcPts val="0"/>
+              </a:spcBef>
+              <a:spcAft>
+                <a:spcPts val="80"/>
+              </a:spcAft>
+              <a:buNone/>
+            </a:pPr>
+            <a:r>
+              <a:rPr lang="en-US" sz="1650" b="1">
+                <a:solidFill>
+                  <a:srgbClr val="C47A20"/>
+                </a:solidFill>
+              </a:rPr>
+              <a:t>Pagination for drill-down</a:t>
+            </a:r>
+            <a:endParaRPr/>
+          </a:p>
+          <a:p>
+            <a:pPr marL="0" indent="0" algn="l">
+              <a:lnSpc>
+                <a:spcPct val="115000"/>
+              </a:lnSpc>
+              <a:spcBef>
+                <a:spcPts val="0"/>
+              </a:spcBef>
+              <a:spcAft>
+                <a:spcPts val="0"/>
+              </a:spcAft>
+              <a:buNone/>
+            </a:pPr>
+            <a:r>
+              <a:rPr lang="en-US" sz="1500">
+                <a:solidFill>
+                  <a:srgbClr val="444444"/>
+                </a:solidFill>
+              </a:rPr>
+              <a:t>PaginationCursor + fetchPage for deleted rows and chart index ranges.</a:t>
+            </a:r>
+            <a:endParaRPr/>
+          </a:p>
+        </p:txBody>
+      </p:sp>
+      <p:sp>
+        <p:nvSpPr>
+          <p:cNvPr id="210" name="tip-card-bg-210"/>
+          <p:cNvSpPr/>
+          <p:nvPr/>
+        </p:nvSpPr>
+        <p:spPr>
+          <a:xfrm>
+            <a:off x="6160775" y="3366500"/>
+            <a:ext cx="5662450" cy="1120000"/>
+          </a:xfrm>
+          <a:prstGeom prst="roundRect">
+            <a:avLst>
+              <a:gd name="adj" fmla="val 8000"/>
+            </a:avLst>
+          </a:prstGeom>
+          <a:solidFill>
+            <a:srgbClr val="FEF5F6"/>
+          </a:solidFill>
+          <a:ln>
+            <a:noFill/>
+          </a:ln>
+          <a:effectLst>
+            <a:outerShdw blurRad="50800" dist="31750" dir="2700000" algn="ctr" rotWithShape="0">
+              <a:srgbClr val="000000">
+                <a:alpha val="28000"/>
+              </a:srgbClr>
+            </a:outerShdw>
+          </a:effectLst>
+        </p:spPr>
+        <p:txBody>
+          <a:bodyPr/>
+          <a:lstStyle/>
+          <a:p>
+            <a:endParaRPr/>
+          </a:p>
+        </p:txBody>
+      </p:sp>
+      <p:sp>
+        <p:nvSpPr>
+          <p:cNvPr id="211" name="tip-emoji-211"/>
+          <p:cNvSpPr txBox="1"/>
+          <p:nvPr/>
+        </p:nvSpPr>
+        <p:spPr>
+          <a:xfrm>
+            <a:off x="6250775" y="3756500"/>
+            <a:ext cx="340000" cy="340000"/>
+          </a:xfrm>
+          <a:prstGeom prst="rect">
+            <a:avLst/>
+          </a:prstGeom>
+          <a:noFill/>
+          <a:ln>
+            <a:noFill/>
+          </a:ln>
+        </p:spPr>
+        <p:txBody>
+          <a:bodyPr anchor="ctr" anchorCtr="1" wrap="none">
+            <a:noAutofit/>
+          </a:bodyPr>
+          <a:lstStyle/>
+          <a:p>
+            <a:pPr algn="ctr">
+              <a:buNone/>
+            </a:pPr>
+            <a:r>
+              <a:rPr lang="en-US" sz="3200"/>
+              <a:t>📐</a:t>
+            </a:r>
+            <a:endParaRPr/>
+          </a:p>
+        </p:txBody>
+      </p:sp>
+      <p:sp>
+        <p:nvSpPr>
+          <p:cNvPr id="212" name="tip-content-212"/>
+          <p:cNvSpPr txBox="1"/>
+          <p:nvPr/>
+        </p:nvSpPr>
+        <p:spPr>
+          <a:xfrm>
+            <a:off x="6680775" y="3451500"/>
+            <a:ext cx="5057450" cy="950000"/>
+          </a:xfrm>
+          <a:prstGeom prst="rect">
+            <a:avLst/>
+          </a:prstGeom>
+          <a:noFill/>
+          <a:ln>
+            <a:noFill/>
+          </a:ln>
+        </p:spPr>
+        <p:txBody>
+          <a:bodyPr anchor="t" anchorCtr="0" wrap="square" lIns="27432" rIns="27432" tIns="0" bIns="0">
+            <a:noAutofit/>
+          </a:bodyPr>
+          <a:lstStyle/>
+          <a:p>
+            <a:pPr marL="0" indent="0" algn="l">
+              <a:lnSpc>
+                <a:spcPct val="105000"/>
+              </a:lnSpc>
+              <a:spcBef>
+                <a:spcPts val="0"/>
+              </a:spcBef>
+              <a:spcAft>
+                <a:spcPts val="80"/>
+              </a:spcAft>
+              <a:buNone/>
+            </a:pPr>
+            <a:r>
+              <a:rPr lang="en-US" sz="1650" b="1">
+                <a:solidFill>
+                  <a:srgbClr val="891019"/>
+                </a:solidFill>
+              </a:rPr>
+              <a:t>Stable ORDER BY</a:t>
+            </a:r>
+            <a:endParaRPr/>
+          </a:p>
+          <a:p>
+            <a:pPr marL="0" indent="0" algn="l">
+              <a:lnSpc>
+                <a:spcPct val="115000"/>
+              </a:lnSpc>
+              <a:spcBef>
+                <a:spcPts val="0"/>
+              </a:spcBef>
+              <a:spcAft>
+                <a:spcPts val="0"/>
+              </a:spcAft>
+              <a:buNone/>
+            </a:pPr>
+            <a:r>
+              <a:rPr lang="en-US" sz="1500">
+                <a:solidFill>
+                  <a:srgbClr val="444444"/>
+                </a:solidFill>
+              </a:rPr>
+              <a:t>Sort on a unique key so offsets and page indexes stay predictable.</a:t>
+            </a:r>
+            <a:endParaRPr/>
+          </a:p>
+        </p:txBody>
+      </p:sp>
+      <p:sp>
+        <p:nvSpPr>
+          <p:cNvPr id="213" name="tip-card-bg-213"/>
+          <p:cNvSpPr/>
+          <p:nvPr/>
+        </p:nvSpPr>
+        <p:spPr>
+          <a:xfrm>
+            <a:off x="338325" y="4616500"/>
+            <a:ext cx="5662450" cy="1120000"/>
+          </a:xfrm>
+          <a:prstGeom prst="roundRect">
+            <a:avLst>
+              <a:gd name="adj" fmla="val 8000"/>
+            </a:avLst>
+          </a:prstGeom>
+          <a:solidFill>
+            <a:srgbClr val="F0F6FF"/>
+          </a:solidFill>
+          <a:ln>
+            <a:noFill/>
+          </a:ln>
+          <a:effectLst>
+            <a:outerShdw blurRad="50800" dist="31750" dir="2700000" algn="ctr" rotWithShape="0">
+              <a:srgbClr val="000000">
+                <a:alpha val="28000"/>
+              </a:srgbClr>
+            </a:outerShdw>
+          </a:effectLst>
+        </p:spPr>
+        <p:txBody>
+          <a:bodyPr/>
+          <a:lstStyle/>
+          <a:p>
+            <a:endParaRPr/>
+          </a:p>
+        </p:txBody>
+      </p:sp>
+      <p:sp>
+        <p:nvSpPr>
+          <p:cNvPr id="214" name="tip-emoji-214"/>
+          <p:cNvSpPr txBox="1"/>
+          <p:nvPr/>
+        </p:nvSpPr>
+        <p:spPr>
+          <a:xfrm>
+            <a:off x="428325" y="5006500"/>
+            <a:ext cx="340000" cy="340000"/>
+          </a:xfrm>
+          <a:prstGeom prst="rect">
+            <a:avLst/>
+          </a:prstGeom>
+          <a:noFill/>
+          <a:ln>
+            <a:noFill/>
+          </a:ln>
+        </p:spPr>
+        <p:txBody>
+          <a:bodyPr anchor="ctr" anchorCtr="1" wrap="none">
+            <a:noAutofit/>
+          </a:bodyPr>
+          <a:lstStyle/>
+          <a:p>
+            <a:pPr algn="ctr">
+              <a:buNone/>
+            </a:pPr>
+            <a:r>
+              <a:rPr lang="en-US" sz="3200"/>
+              <a:t>⚡</a:t>
+            </a:r>
+            <a:endParaRPr/>
+          </a:p>
+        </p:txBody>
+      </p:sp>
+      <p:sp>
+        <p:nvSpPr>
+          <p:cNvPr id="215" name="tip-content-215"/>
+          <p:cNvSpPr txBox="1"/>
+          <p:nvPr/>
+        </p:nvSpPr>
+        <p:spPr>
+          <a:xfrm>
+            <a:off x="858325" y="4701500"/>
+            <a:ext cx="5057450" cy="950000"/>
+          </a:xfrm>
+          <a:prstGeom prst="rect">
+            <a:avLst/>
+          </a:prstGeom>
+          <a:noFill/>
+          <a:ln>
+            <a:noFill/>
+          </a:ln>
+        </p:spPr>
+        <p:txBody>
+          <a:bodyPr anchor="t" anchorCtr="0" wrap="square" lIns="27432" rIns="27432" tIns="0" bIns="0">
+            <a:noAutofit/>
+          </a:bodyPr>
+          <a:lstStyle/>
+          <a:p>
+            <a:pPr marL="0" indent="0" algn="l">
+              <a:lnSpc>
+                <a:spcPct val="105000"/>
+              </a:lnSpc>
+              <a:spcBef>
+                <a:spcPts val="0"/>
+              </a:spcBef>
+              <a:spcAft>
+                <a:spcPts val="80"/>
+              </a:spcAft>
+              <a:buNone/>
+            </a:pPr>
+            <a:r>
+              <a:rPr lang="en-US" sz="1650" b="1">
+                <a:solidFill>
+                  <a:srgbClr val="2E6DB4"/>
+                </a:solidFill>
+              </a:rPr>
+              <a:t>Right-size each fetch</a:t>
+            </a:r>
+            <a:endParaRPr/>
+          </a:p>
+          <a:p>
+            <a:pPr marL="0" indent="0" algn="l">
+              <a:lnSpc>
+                <a:spcPct val="115000"/>
+              </a:lnSpc>
+              <a:spcBef>
+                <a:spcPts val="0"/>
+              </a:spcBef>
+              <a:spcAft>
+                <a:spcPts val="0"/>
+              </a:spcAft>
+              <a:buNone/>
+            </a:pPr>
+            <a:r>
+              <a:rPr lang="en-US" sz="1500">
+                <a:solidFill>
+                  <a:srgbClr val="444444"/>
+                </a:solidFill>
+              </a:rPr>
+              <a:t>Smaller batches feel snappier; larger batches mean fewer fetch calls.</a:t>
+            </a:r>
+            <a:endParaRPr/>
+          </a:p>
+        </p:txBody>
+      </p:sp>
+      <p:sp>
+        <p:nvSpPr>
+          <p:cNvPr id="216" name="tip-card-bg-216"/>
+          <p:cNvSpPr/>
+          <p:nvPr/>
+        </p:nvSpPr>
+        <p:spPr>
+          <a:xfrm>
+            <a:off x="6160775" y="4616500"/>
+            <a:ext cx="5662450" cy="1120000"/>
+          </a:xfrm>
+          <a:prstGeom prst="roundRect">
+            <a:avLst>
+              <a:gd name="adj" fmla="val 8000"/>
+            </a:avLst>
+          </a:prstGeom>
+          <a:solidFill>
+            <a:srgbClr val="F7F5FA"/>
+          </a:solidFill>
+          <a:ln>
+            <a:noFill/>
+          </a:ln>
+          <a:effectLst>
+            <a:outerShdw blurRad="50800" dist="31750" dir="2700000" algn="ctr" rotWithShape="0">
+              <a:srgbClr val="000000">
+                <a:alpha val="28000"/>
+              </a:srgbClr>
+            </a:outerShdw>
+          </a:effectLst>
+        </p:spPr>
+        <p:txBody>
+          <a:bodyPr/>
+          <a:lstStyle/>
+          <a:p>
+            <a:endParaRPr/>
+          </a:p>
+        </p:txBody>
+      </p:sp>
+      <p:sp>
+        <p:nvSpPr>
+          <p:cNvPr id="217" name="tip-emoji-217"/>
+          <p:cNvSpPr txBox="1"/>
+          <p:nvPr/>
+        </p:nvSpPr>
+        <p:spPr>
+          <a:xfrm>
+            <a:off x="6250775" y="5006500"/>
+            <a:ext cx="340000" cy="340000"/>
+          </a:xfrm>
+          <a:prstGeom prst="rect">
+            <a:avLst/>
+          </a:prstGeom>
+          <a:noFill/>
+          <a:ln>
+            <a:noFill/>
+          </a:ln>
+        </p:spPr>
+        <p:txBody>
+          <a:bodyPr anchor="ctr" anchorCtr="1" wrap="none">
+            <a:noAutofit/>
+          </a:bodyPr>
+          <a:lstStyle/>
+          <a:p>
+            <a:pPr algn="ctr">
+              <a:buNone/>
+            </a:pPr>
+            <a:r>
+              <a:rPr lang="en-US" sz="3200"/>
+              <a:t>🛡️</a:t>
+            </a:r>
+            <a:endParaRPr/>
+          </a:p>
+        </p:txBody>
+      </p:sp>
+      <p:sp>
+        <p:nvSpPr>
+          <p:cNvPr id="218" name="tip-content-218"/>
+          <p:cNvSpPr txBox="1"/>
+          <p:nvPr/>
+        </p:nvSpPr>
+        <p:spPr>
+          <a:xfrm>
+            <a:off x="6680775" y="4701500"/>
+            <a:ext cx="5057450" cy="950000"/>
+          </a:xfrm>
+          <a:prstGeom prst="rect">
+            <a:avLst/>
+          </a:prstGeom>
+          <a:noFill/>
+          <a:ln>
+            <a:noFill/>
+          </a:ln>
+        </p:spPr>
+        <p:txBody>
+          <a:bodyPr anchor="t" anchorCtr="0" wrap="square" lIns="27432" rIns="27432" tIns="0" bIns="0">
+            <a:noAutofit/>
+          </a:bodyPr>
+          <a:lstStyle/>
+          <a:p>
+            <a:pPr marL="0" indent="0" algn="l">
+              <a:lnSpc>
+                <a:spcPct val="105000"/>
+              </a:lnSpc>
+              <a:spcBef>
+                <a:spcPts val="0"/>
+              </a:spcBef>
+              <a:spcAft>
+                <a:spcPts val="80"/>
+              </a:spcAft>
+              <a:buNone/>
+            </a:pPr>
+            <a:r>
+              <a:rPr lang="en-US" sz="1650" b="1">
+                <a:solidFill>
+                  <a:srgbClr val="6B5B95"/>
+                </a:solidFill>
+              </a:rPr>
+              <a:t>USER_MODE by default</a:t>
+            </a:r>
+            <a:endParaRPr/>
+          </a:p>
+          <a:p>
+            <a:pPr marL="0" indent="0" algn="l">
+              <a:lnSpc>
+                <a:spcPct val="115000"/>
+              </a:lnSpc>
+              <a:spcBef>
+                <a:spcPts val="0"/>
+              </a:spcBef>
+              <a:spcAft>
+                <a:spcPts val="0"/>
+              </a:spcAft>
+              <a:buNone/>
+            </a:pPr>
+            <a:r>
+              <a:rPr lang="en-US" sz="1500">
+                <a:solidFill>
+                  <a:srgbClr val="444444"/>
+                </a:solidFill>
+              </a:rPr>
+              <a:t>Pass AccessLevel.USER_MODE on getCursor unless elevated access is required.</a:t>
+            </a:r>
+            <a:endParaRPr/>
+          </a:p>
+        </p:txBody>
+      </p:sp>
+      <p:sp>
+        <p:nvSpPr>
+          <p:cNvPr id="118" name="tips-subtitle"/>
+          <p:cNvSpPr txBox="1"/>
+          <p:nvPr/>
+        </p:nvSpPr>
+        <p:spPr>
+          <a:xfrm>
+            <a:off x="338325" y="995000"/>
+            <a:ext cx="11484900" cy="150000"/>
+          </a:xfrm>
+          <a:prstGeom prst="rect">
+            <a:avLst/>
+          </a:prstGeom>
+          <a:noFill/>
+          <a:ln>
+            <a:noFill/>
+          </a:ln>
+        </p:spPr>
+        <p:txBody>
+          <a:bodyPr anchor="t" wrap="square">
+            <a:noAutofit/>
+          </a:bodyPr>
+          <a:lstStyle/>
+          <a:p>
+            <a:pPr algn="l">
+              <a:buNone/>
+            </a:pPr>
+            <a:r>
+              <a:rPr lang="en-US" sz="1500" i="1">
+                <a:solidFill>
+                  <a:srgbClr val="666666"/>
+                </a:solidFill>
+              </a:rPr>
+              <a:t>Practical patterns from the Apex Cursor demos</a:t>
             </a:r>
             <a:endParaRPr/>
           </a:p>
@@ -17140,54 +20326,37 @@
           <a:chExt cx="0" cy="0"/>
         </a:xfrm>
       </p:grpSpPr>
-      <p:sp>
-        <p:nvSpPr>
-          <p:cNvPr id="115" name="Google Shape;115;p14"/>
-          <p:cNvSpPr txBox="1"/>
-          <p:nvPr>
-            <p:ph idx="1" type="body"/>
-          </p:nvPr>
-        </p:nvSpPr>
+      <p:pic>
+        <p:nvPicPr>
+          <p:cNvPr id="117" name="demo1-virtual-datatable" title="Apex Cursor Demo - Infinite Loading"/>
+          <p:cNvPicPr preferRelativeResize="0"/>
+          <p:nvPr/>
+        </p:nvPicPr>
+        <p:blipFill>
+          <a:blip r:embed="rId3">
+            <a:alphaModFix/>
+          </a:blip>
+          <a:stretch>
+            <a:fillRect/>
+          </a:stretch>
+        </p:blipFill>
         <p:spPr>
           <a:xfrm>
-            <a:off x="338325" y="1020943"/>
-            <a:ext cx="11484900" cy="5257200"/>
+            <a:off x="609412" y="1150000"/>
+            <a:ext cx="10970000" cy="5291992"/>
           </a:xfrm>
           <a:prstGeom prst="rect">
             <a:avLst/>
           </a:prstGeom>
-          <a:noFill/>
-          <a:ln>
-            <a:noFill/>
-          </a:ln>
-        </p:spPr>
-        <p:txBody>
-          <a:bodyPr anchorCtr="0" anchor="t" bIns="0" lIns="9125" spcFirstLastPara="1" rIns="0" wrap="square" tIns="0">
-            <a:noAutofit/>
-          </a:bodyPr>
-          <a:lstStyle/>
-          <a:p>
-            <a:pPr indent="0" lvl="0" marL="0" rtl="0" algn="l">
-              <a:lnSpc>
-                <a:spcPct val="100000"/>
-              </a:lnSpc>
-              <a:spcBef>
-                <a:spcPts val="0"/>
-              </a:spcBef>
-              <a:spcAft>
-                <a:spcPts val="0"/>
-              </a:spcAft>
-              <a:buSzPts val="2400"/>
-              <a:buNone/>
-            </a:pPr>
-            <a:r>
-              <a:rPr lang="en-US"/>
-              <a:t/>
-            </a:r>
-            <a:endParaRPr/>
-          </a:p>
-        </p:txBody>
-      </p:sp>
+          <a:effectLst>
+            <a:outerShdw blurRad="63500" dist="47625" dir="2700000" algn="ctr" rotWithShape="0">
+              <a:srgbClr val="000000">
+                <a:alpha val="38000"/>
+              </a:srgbClr>
+            </a:outerShdw>
+          </a:effectLst>
+        </p:spPr>
+      </p:pic>
       <p:sp>
         <p:nvSpPr>
           <p:cNvPr id="116" name="Google Shape;116;p14"/>
@@ -17266,7 +20435,7 @@
     <p:spTree>
       <p:nvGrpSpPr>
         <p:cNvPr id="114" name="Shape 114"/>
-        <p:cNvGrpSpPr/>
+        <p:cNvSpPr/>
         <p:nvPr/>
       </p:nvGrpSpPr>
       <p:grpSpPr>
@@ -17279,27 +20448,36 @@
       </p:grpSpPr>
       <p:sp>
         <p:nvSpPr>
-          <p:cNvPr id="115" name="Google Shape;115;p14"/>
+          <p:cNvPr id="201" name="highlight-code-1"/>
           <p:cNvSpPr txBox="1"/>
-          <p:nvPr>
-            <p:ph idx="1" type="body"/>
-          </p:nvPr>
+          <p:nvPr/>
         </p:nvSpPr>
         <p:spPr>
           <a:xfrm>
-            <a:off x="338325" y="1020943"/>
-            <a:ext cx="11484900" cy="5257200"/>
-          </a:xfrm>
-          <a:prstGeom prst="rect">
-            <a:avLst/>
+            <a:off x="338325" y="1603500"/>
+            <a:ext cx="3748300" cy="2450000"/>
+          </a:xfrm>
+          <a:prstGeom prst="roundRect">
+            <a:avLst>
+              <a:gd name="adj" fmla="val 6000"/>
+            </a:avLst>
           </a:prstGeom>
-          <a:noFill/>
+          <a:solidFill>
+            <a:srgbClr val="1E1E1E"/>
+          </a:solidFill>
           <a:ln>
             <a:noFill/>
           </a:ln>
+          <a:effectLst>
+            <a:outerShdw blurRad="50800" dist="31750" dir="2700000" algn="ctr" rotWithShape="0">
+              <a:srgbClr val="000000">
+                <a:alpha val="28000"/>
+              </a:srgbClr>
+            </a:outerShdw>
+          </a:effectLst>
         </p:spPr>
         <p:txBody>
-          <a:bodyPr anchorCtr="0" anchor="t" bIns="0" lIns="9125" spcFirstLastPara="1" rIns="0" wrap="square" tIns="0">
+          <a:bodyPr anchorCtr="0" anchor="t" bIns="160000" lIns="72000" rIns="72000" tIns="55000" wrap="square">
             <a:noAutofit/>
           </a:bodyPr>
           <a:lstStyle/>
@@ -17309,17 +20487,723 @@
                 <a:spcPct val="100000"/>
               </a:lnSpc>
               <a:spcBef>
-                <a:spcPts val="0"/>
-              </a:spcBef>
-              <a:spcAft>
-                <a:spcPts val="0"/>
-              </a:spcAft>
-              <a:buSzPts val="2400"/>
+                <a:spcPts val="80"/>
+              </a:spcBef>
+              <a:spcAft>
+                <a:spcPts val="0"/>
+              </a:spcAft>
               <a:buNone/>
             </a:pPr>
             <a:r>
-              <a:rPr lang="en-US"/>
-              <a:t/>
+              <a:rPr lang="en-US" sz="1500" typeface="Consolas">
+                <a:solidFill>
+                  <a:srgbClr val="6A9955"/>
+                </a:solidFill>
+              </a:rPr>
+              <a:t>apex&gt;</a:t>
+            </a:r>
+            <a:endParaRPr/>
+          </a:p>
+          <a:p>
+            <a:pPr indent="0" lvl="0" marL="0" rtl="0" algn="l">
+              <a:lnSpc>
+                <a:spcPct val="100000"/>
+              </a:lnSpc>
+              <a:spcBef>
+                <a:spcPts val="60"/>
+              </a:spcBef>
+              <a:spcAft>
+                <a:spcPts val="0"/>
+              </a:spcAft>
+              <a:buNone/>
+            </a:pPr>
+            <a:r>
+              <a:rPr lang="en-US" sz="1500" typeface="Consolas">
+                <a:solidFill>
+                  <a:srgbClr val="4EC9B0"/>
+                </a:solidFill>
+              </a:rPr>
+              <a:t>Database.Cursor</a:t>
+            </a:r>
+            <a:r>
+              <a:rPr lang="en-US" sz="1500" typeface="Consolas">
+                <a:solidFill>
+                  <a:srgbClr val="D4D4D4"/>
+                </a:solidFill>
+              </a:rPr>
+              <a:t> c =</a:t>
+            </a:r>
+            <a:endParaRPr/>
+          </a:p>
+          <a:p>
+            <a:pPr indent="0" lvl="0" marL="0" rtl="0" algn="l">
+              <a:lnSpc>
+                <a:spcPct val="100000"/>
+              </a:lnSpc>
+              <a:spcBef>
+                <a:spcPts val="40"/>
+              </a:spcBef>
+              <a:spcAft>
+                <a:spcPts val="0"/>
+              </a:spcAft>
+              <a:buNone/>
+            </a:pPr>
+            <a:r>
+              <a:rPr lang="en-US" sz="1500" typeface="Consolas">
+                <a:solidFill>
+                  <a:srgbClr val="DCDCAA"/>
+                </a:solidFill>
+              </a:rPr>
+              <a:t>  Database.getCursor(</a:t>
+            </a:r>
+            <a:endParaRPr/>
+          </a:p>
+          <a:p>
+            <a:pPr indent="0" lvl="0" marL="0" rtl="0" algn="l">
+              <a:lnSpc>
+                <a:spcPct val="100000"/>
+              </a:lnSpc>
+              <a:spcBef>
+                <a:spcPts val="40"/>
+              </a:spcBef>
+              <a:spcAft>
+                <a:spcPts val="0"/>
+              </a:spcAft>
+              <a:buNone/>
+            </a:pPr>
+            <a:r>
+              <a:rPr lang="en-US" sz="1500" typeface="Consolas">
+                <a:solidFill>
+                  <a:srgbClr val="CE9178"/>
+                </a:solidFill>
+              </a:rPr>
+              <a:t>    soql,</a:t>
+            </a:r>
+            <a:endParaRPr/>
+          </a:p>
+          <a:p>
+            <a:pPr indent="0" lvl="0" marL="0" rtl="0" algn="l">
+              <a:lnSpc>
+                <a:spcPct val="100000"/>
+              </a:lnSpc>
+              <a:spcBef>
+                <a:spcPts val="40"/>
+              </a:spcBef>
+              <a:spcAft>
+                <a:spcPts val="160"/>
+              </a:spcAft>
+              <a:buNone/>
+            </a:pPr>
+            <a:r>
+              <a:rPr lang="en-US" sz="1500" typeface="Consolas">
+                <a:solidFill>
+                  <a:srgbClr val="CE9178"/>
+                </a:solidFill>
+              </a:rPr>
+              <a:t>    AccessLevel.USER_MODE);</a:t>
+            </a:r>
+            <a:endParaRPr/>
+          </a:p>
+        </p:txBody>
+      </p:sp>
+      <p:sp>
+        <p:nvSpPr>
+          <p:cNvPr id="202" name="highlight-badge-1"/>
+          <p:cNvSpPr txBox="1"/>
+          <p:nvPr/>
+        </p:nvSpPr>
+        <p:spPr>
+          <a:xfrm>
+            <a:off x="127125" y="1392300"/>
+            <a:ext cx="480000" cy="480000"/>
+          </a:xfrm>
+          <a:prstGeom prst="ellipse">
+            <a:avLst/>
+          </a:prstGeom>
+          <a:solidFill>
+            <a:srgbClr val="891019"/>
+          </a:solidFill>
+          <a:ln>
+            <a:noFill/>
+          </a:ln>
+          <a:effectLst>
+            <a:outerShdw blurRad="57150" dist="38100" dir="2700000" algn="ctr" rotWithShape="0">
+              <a:srgbClr val="000000">
+                <a:alpha val="45000"/>
+              </a:srgbClr>
+            </a:outerShdw>
+          </a:effectLst>
+        </p:spPr>
+        <p:txBody>
+          <a:bodyPr anchor="ctr" anchorCtr="1" wrap="none" lIns="0" rIns="0" tIns="0" bIns="0">
+            <a:noAutofit/>
+          </a:bodyPr>
+          <a:lstStyle/>
+          <a:p>
+            <a:pPr algn="ctr">
+              <a:buNone/>
+            </a:pPr>
+            <a:r>
+              <a:rPr lang="en-US" sz="2400" b="1">
+                <a:solidFill>
+                  <a:srgbClr val="FFFFFF"/>
+                </a:solidFill>
+              </a:rPr>
+              <a:t>1</a:t>
+            </a:r>
+            <a:endParaRPr/>
+          </a:p>
+        </p:txBody>
+      </p:sp>
+      <p:sp>
+        <p:nvSpPr>
+          <p:cNvPr id="203" name="highlight-code-2"/>
+          <p:cNvSpPr txBox="1"/>
+          <p:nvPr/>
+        </p:nvSpPr>
+        <p:spPr>
+          <a:xfrm>
+            <a:off x="4206625" y="1603500"/>
+            <a:ext cx="3748300" cy="2450000"/>
+          </a:xfrm>
+          <a:prstGeom prst="roundRect">
+            <a:avLst>
+              <a:gd name="adj" fmla="val 6000"/>
+            </a:avLst>
+          </a:prstGeom>
+          <a:solidFill>
+            <a:srgbClr val="1E1E1E"/>
+          </a:solidFill>
+          <a:ln>
+            <a:noFill/>
+          </a:ln>
+          <a:effectLst>
+            <a:outerShdw blurRad="50800" dist="31750" dir="2700000" algn="ctr" rotWithShape="0">
+              <a:srgbClr val="000000">
+                <a:alpha val="28000"/>
+              </a:srgbClr>
+            </a:outerShdw>
+          </a:effectLst>
+        </p:spPr>
+        <p:txBody>
+          <a:bodyPr anchorCtr="0" anchor="t" bIns="160000" lIns="72000" rIns="72000" tIns="55000" wrap="square">
+            <a:noAutofit/>
+          </a:bodyPr>
+          <a:lstStyle/>
+          <a:p>
+            <a:pPr indent="0" lvl="0" marL="0" rtl="0" algn="l">
+              <a:lnSpc>
+                <a:spcPct val="100000"/>
+              </a:lnSpc>
+              <a:spcBef>
+                <a:spcPts val="80"/>
+              </a:spcBef>
+              <a:spcAft>
+                <a:spcPts val="0"/>
+              </a:spcAft>
+              <a:buNone/>
+            </a:pPr>
+            <a:r>
+              <a:rPr lang="en-US" sz="1500" typeface="Consolas">
+                <a:solidFill>
+                  <a:srgbClr val="6A9955"/>
+                </a:solidFill>
+              </a:rPr>
+              <a:t>apex&gt;</a:t>
+            </a:r>
+            <a:endParaRPr/>
+          </a:p>
+          <a:p>
+            <a:pPr indent="0" lvl="0" marL="0" rtl="0" algn="l">
+              <a:lnSpc>
+                <a:spcPct val="100000"/>
+              </a:lnSpc>
+              <a:spcBef>
+                <a:spcPts val="60"/>
+              </a:spcBef>
+              <a:spcAft>
+                <a:spcPts val="0"/>
+              </a:spcAft>
+              <a:buNone/>
+            </a:pPr>
+            <a:r>
+              <a:rPr lang="en-US" sz="1500" typeface="Consolas">
+                <a:solidFill>
+                  <a:srgbClr val="D4D4D4"/>
+                </a:solidFill>
+              </a:rPr>
+              <a:t>List&lt;Account&gt; batch =</a:t>
+            </a:r>
+            <a:endParaRPr/>
+          </a:p>
+          <a:p>
+            <a:pPr indent="0" lvl="0" marL="0" rtl="0" algn="l">
+              <a:lnSpc>
+                <a:spcPct val="100000"/>
+              </a:lnSpc>
+              <a:spcBef>
+                <a:spcPts val="40"/>
+              </a:spcBef>
+              <a:spcAft>
+                <a:spcPts val="0"/>
+              </a:spcAft>
+              <a:buNone/>
+            </a:pPr>
+            <a:r>
+              <a:rPr lang="en-US" sz="1500" typeface="Consolas">
+                <a:solidFill>
+                  <a:srgbClr val="DCDCAA"/>
+                </a:solidFill>
+              </a:rPr>
+              <a:t>  c.fetch(offset,</a:t>
+            </a:r>
+            <a:endParaRPr/>
+          </a:p>
+          <a:p>
+            <a:pPr indent="0" lvl="0" marL="0" rtl="0" algn="l">
+              <a:lnSpc>
+                <a:spcPct val="100000"/>
+              </a:lnSpc>
+              <a:spcBef>
+                <a:spcPts val="40"/>
+              </a:spcBef>
+              <a:spcAft>
+                <a:spcPts val="0"/>
+              </a:spcAft>
+              <a:buNone/>
+            </a:pPr>
+            <a:r>
+              <a:rPr lang="en-US" sz="1500" typeface="Consolas">
+                <a:solidFill>
+                  <a:srgbClr val="CE9178"/>
+                </a:solidFill>
+              </a:rPr>
+              <a:t>    batchSize);</a:t>
+            </a:r>
+            <a:endParaRPr/>
+          </a:p>
+          <a:p>
+            <a:pPr indent="0" lvl="0" marL="0" rtl="0" algn="l">
+              <a:lnSpc>
+                <a:spcPct val="100000"/>
+              </a:lnSpc>
+              <a:spcBef>
+                <a:spcPts val="40"/>
+              </a:spcBef>
+              <a:spcAft>
+                <a:spcPts val="0"/>
+              </a:spcAft>
+              <a:buNone/>
+            </a:pPr>
+            <a:r>
+              <a:rPr lang="en-US" sz="1500" typeface="Consolas">
+                <a:solidFill>
+                  <a:srgbClr val="D4D4D4"/>
+                </a:solidFill>
+              </a:rPr>
+              <a:t>result.hasMore =</a:t>
+            </a:r>
+            <a:endParaRPr/>
+          </a:p>
+          <a:p>
+            <a:pPr indent="0" lvl="0" marL="0" rtl="0" algn="l">
+              <a:lnSpc>
+                <a:spcPct val="100000"/>
+              </a:lnSpc>
+              <a:spcBef>
+                <a:spcPts val="40"/>
+              </a:spcBef>
+              <a:spcAft>
+                <a:spcPts val="160"/>
+              </a:spcAft>
+              <a:buNone/>
+            </a:pPr>
+            <a:r>
+              <a:rPr lang="en-US" sz="1500" typeface="Consolas">
+                <a:solidFill>
+                  <a:srgbClr val="CE9178"/>
+                </a:solidFill>
+              </a:rPr>
+              <a:t>  offset &lt; c.getNumRecords();</a:t>
+            </a:r>
+            <a:endParaRPr/>
+          </a:p>
+        </p:txBody>
+      </p:sp>
+      <p:sp>
+        <p:nvSpPr>
+          <p:cNvPr id="204" name="highlight-badge-2"/>
+          <p:cNvSpPr txBox="1"/>
+          <p:nvPr/>
+        </p:nvSpPr>
+        <p:spPr>
+          <a:xfrm>
+            <a:off x="3995425" y="1392300"/>
+            <a:ext cx="480000" cy="480000"/>
+          </a:xfrm>
+          <a:prstGeom prst="ellipse">
+            <a:avLst/>
+          </a:prstGeom>
+          <a:solidFill>
+            <a:srgbClr val="891019"/>
+          </a:solidFill>
+          <a:ln>
+            <a:noFill/>
+          </a:ln>
+          <a:effectLst>
+            <a:outerShdw blurRad="57150" dist="38100" dir="2700000" algn="ctr" rotWithShape="0">
+              <a:srgbClr val="000000">
+                <a:alpha val="45000"/>
+              </a:srgbClr>
+            </a:outerShdw>
+          </a:effectLst>
+        </p:spPr>
+        <p:txBody>
+          <a:bodyPr anchor="ctr" anchorCtr="1" wrap="none" lIns="0" rIns="0" tIns="0" bIns="0">
+            <a:noAutofit/>
+          </a:bodyPr>
+          <a:lstStyle/>
+          <a:p>
+            <a:pPr algn="ctr">
+              <a:buNone/>
+            </a:pPr>
+            <a:r>
+              <a:rPr lang="en-US" sz="2400" b="1">
+                <a:solidFill>
+                  <a:srgbClr val="FFFFFF"/>
+                </a:solidFill>
+              </a:rPr>
+              <a:t>2</a:t>
+            </a:r>
+            <a:endParaRPr/>
+          </a:p>
+        </p:txBody>
+      </p:sp>
+      <p:sp>
+        <p:nvSpPr>
+          <p:cNvPr id="205" name="highlight-code-3"/>
+          <p:cNvSpPr txBox="1"/>
+          <p:nvPr/>
+        </p:nvSpPr>
+        <p:spPr>
+          <a:xfrm>
+            <a:off x="8074925" y="1603500"/>
+            <a:ext cx="3748300" cy="2450000"/>
+          </a:xfrm>
+          <a:prstGeom prst="roundRect">
+            <a:avLst>
+              <a:gd name="adj" fmla="val 6000"/>
+            </a:avLst>
+          </a:prstGeom>
+          <a:solidFill>
+            <a:srgbClr val="1E1E1E"/>
+          </a:solidFill>
+          <a:ln>
+            <a:noFill/>
+          </a:ln>
+          <a:effectLst>
+            <a:outerShdw blurRad="50800" dist="31750" dir="2700000" algn="ctr" rotWithShape="0">
+              <a:srgbClr val="000000">
+                <a:alpha val="28000"/>
+              </a:srgbClr>
+            </a:outerShdw>
+          </a:effectLst>
+        </p:spPr>
+        <p:txBody>
+          <a:bodyPr anchorCtr="0" anchor="t" bIns="160000" lIns="72000" rIns="72000" tIns="55000" wrap="square">
+            <a:noAutofit/>
+          </a:bodyPr>
+          <a:lstStyle/>
+          <a:p>
+            <a:pPr indent="0" lvl="0" marL="0" rtl="0" algn="l">
+              <a:lnSpc>
+                <a:spcPct val="100000"/>
+              </a:lnSpc>
+              <a:spcBef>
+                <a:spcPts val="80"/>
+              </a:spcBef>
+              <a:spcAft>
+                <a:spcPts val="0"/>
+              </a:spcAft>
+              <a:buNone/>
+            </a:pPr>
+            <a:r>
+              <a:rPr lang="en-US" sz="1500" typeface="Consolas">
+                <a:solidFill>
+                  <a:srgbClr val="6A9955"/>
+                </a:solidFill>
+              </a:rPr>
+              <a:t>apex&gt;</a:t>
+            </a:r>
+            <a:endParaRPr/>
+          </a:p>
+          <a:p>
+            <a:pPr indent="0" lvl="0" marL="0" rtl="0" algn="l">
+              <a:lnSpc>
+                <a:spcPct val="100000"/>
+              </a:lnSpc>
+              <a:spcBef>
+                <a:spcPts val="60"/>
+              </a:spcBef>
+              <a:spcAft>
+                <a:spcPts val="0"/>
+              </a:spcAft>
+              <a:buNone/>
+            </a:pPr>
+            <a:r>
+              <a:rPr lang="en-US" sz="1500" typeface="Consolas">
+                <a:solidFill>
+                  <a:srgbClr val="569CD6"/>
+                </a:solidFill>
+              </a:rPr>
+              <a:t>const result = await</a:t>
+            </a:r>
+            <a:endParaRPr/>
+          </a:p>
+          <a:p>
+            <a:pPr indent="0" lvl="0" marL="0" rtl="0" algn="l">
+              <a:lnSpc>
+                <a:spcPct val="100000"/>
+              </a:lnSpc>
+              <a:spcBef>
+                <a:spcPts val="40"/>
+              </a:spcBef>
+              <a:spcAft>
+                <a:spcPts val="0"/>
+              </a:spcAft>
+              <a:buNone/>
+            </a:pPr>
+            <a:r>
+              <a:rPr lang="en-US" sz="1500" typeface="Consolas">
+                <a:solidFill>
+                  <a:srgbClr val="DCDCAA"/>
+                </a:solidFill>
+              </a:rPr>
+              <a:t>  loadMoreRecords({</a:t>
+            </a:r>
+            <a:endParaRPr/>
+          </a:p>
+          <a:p>
+            <a:pPr indent="0" lvl="0" marL="0" rtl="0" algn="l">
+              <a:lnSpc>
+                <a:spcPct val="100000"/>
+              </a:lnSpc>
+              <a:spcBef>
+                <a:spcPts val="40"/>
+              </a:spcBef>
+              <a:spcAft>
+                <a:spcPts val="0"/>
+              </a:spcAft>
+              <a:buNone/>
+            </a:pPr>
+            <a:r>
+              <a:rPr lang="en-US" sz="1500" typeface="Consolas">
+                <a:solidFill>
+                  <a:srgbClr val="CE9178"/>
+                </a:solidFill>
+              </a:rPr>
+              <a:t>    request, useSessionCache</a:t>
+            </a:r>
+            <a:endParaRPr/>
+          </a:p>
+          <a:p>
+            <a:pPr indent="0" lvl="0" marL="0" rtl="0" algn="l">
+              <a:lnSpc>
+                <a:spcPct val="100000"/>
+              </a:lnSpc>
+              <a:spcBef>
+                <a:spcPts val="40"/>
+              </a:spcBef>
+              <a:spcAft>
+                <a:spcPts val="160"/>
+              </a:spcAft>
+              <a:buNone/>
+            </a:pPr>
+            <a:r>
+              <a:rPr lang="en-US" sz="1500" typeface="Consolas">
+                <a:solidFill>
+                  <a:srgbClr val="DCDCAA"/>
+                </a:solidFill>
+              </a:rPr>
+              <a:t>  });</a:t>
+            </a:r>
+            <a:endParaRPr/>
+          </a:p>
+        </p:txBody>
+      </p:sp>
+      <p:sp>
+        <p:nvSpPr>
+          <p:cNvPr id="206" name="highlight-badge-3"/>
+          <p:cNvSpPr txBox="1"/>
+          <p:nvPr/>
+        </p:nvSpPr>
+        <p:spPr>
+          <a:xfrm>
+            <a:off x="7863725" y="1392300"/>
+            <a:ext cx="480000" cy="480000"/>
+          </a:xfrm>
+          <a:prstGeom prst="ellipse">
+            <a:avLst/>
+          </a:prstGeom>
+          <a:solidFill>
+            <a:srgbClr val="891019"/>
+          </a:solidFill>
+          <a:ln>
+            <a:noFill/>
+          </a:ln>
+          <a:effectLst>
+            <a:outerShdw blurRad="57150" dist="38100" dir="2700000" algn="ctr" rotWithShape="0">
+              <a:srgbClr val="000000">
+                <a:alpha val="45000"/>
+              </a:srgbClr>
+            </a:outerShdw>
+          </a:effectLst>
+        </p:spPr>
+        <p:txBody>
+          <a:bodyPr anchor="ctr" anchorCtr="1" wrap="none" lIns="0" rIns="0" tIns="0" bIns="0">
+            <a:noAutofit/>
+          </a:bodyPr>
+          <a:lstStyle/>
+          <a:p>
+            <a:pPr algn="ctr">
+              <a:buNone/>
+            </a:pPr>
+            <a:r>
+              <a:rPr lang="en-US" sz="2400" b="1">
+                <a:solidFill>
+                  <a:srgbClr val="FFFFFF"/>
+                </a:solidFill>
+              </a:rPr>
+              <a:t>3</a:t>
+            </a:r>
+            <a:endParaRPr/>
+          </a:p>
+        </p:txBody>
+      </p:sp>
+      <p:sp>
+        <p:nvSpPr>
+          <p:cNvPr id="207" name="highlight-info-panel"/>
+          <p:cNvSpPr txBox="1"/>
+          <p:nvPr/>
+        </p:nvSpPr>
+        <p:spPr>
+          <a:xfrm>
+            <a:off x="338325" y="4173500"/>
+            <a:ext cx="11484900" cy="1950000"/>
+          </a:xfrm>
+          <a:prstGeom prst="roundRect">
+            <a:avLst>
+              <a:gd name="adj" fmla="val 6000"/>
+            </a:avLst>
+          </a:prstGeom>
+          <a:solidFill>
+            <a:srgbClr val="F4F7FC"/>
+          </a:solidFill>
+          <a:ln>
+            <a:noFill/>
+          </a:ln>
+          <a:effectLst>
+            <a:outerShdw blurRad="50800" dist="31750" dir="2700000" algn="ctr" rotWithShape="0">
+              <a:srgbClr val="000000">
+                <a:alpha val="28000"/>
+              </a:srgbClr>
+            </a:outerShdw>
+          </a:effectLst>
+        </p:spPr>
+        <p:txBody>
+          <a:bodyPr anchorCtr="0" anchor="t" bIns="120000" lIns="140000" rIns="120000" tIns="120000" wrap="square">
+            <a:noAutofit/>
+          </a:bodyPr>
+          <a:lstStyle/>
+          <a:p>
+            <a:pPr indent="-285750" lvl="0" marL="457200" rtl="0" algn="l">
+              <a:lnSpc>
+                <a:spcPct val="115000"/>
+              </a:lnSpc>
+              <a:spcBef>
+                <a:spcPts val="360"/>
+              </a:spcBef>
+              <a:spcAft>
+                <a:spcPts val="0"/>
+              </a:spcAft>
+              <a:buClr>
+                <a:srgbClr val="891019"/>
+              </a:buClr>
+              <a:buSzPts val="1600"/>
+              <a:buChar char="•"/>
+            </a:pPr>
+            <a:r>
+              <a:rPr lang="en-US" sz="1800"/>
+              <a:t>Infinite scroll loads 50 rows at a time — no SOQL OFFSET</a:t>
+            </a:r>
+            <a:endParaRPr/>
+          </a:p>
+          <a:p>
+            <a:pPr indent="-285750" lvl="0" marL="457200" rtl="0" algn="l">
+              <a:lnSpc>
+                <a:spcPct val="115000"/>
+              </a:lnSpc>
+              <a:spcBef>
+                <a:spcPts val="220"/>
+              </a:spcBef>
+              <a:spcAft>
+                <a:spcPts val="0"/>
+              </a:spcAft>
+              <a:buClr>
+                <a:srgbClr val="891019"/>
+              </a:buClr>
+              <a:buSzPts val="1600"/>
+              <a:buChar char="•"/>
+            </a:pPr>
+            <a:r>
+              <a:rPr lang="en-US" sz="1800"/>
+              <a:t>Cursor held in LWC state or Cache.Session across Apex calls</a:t>
+            </a:r>
+            <a:endParaRPr/>
+          </a:p>
+          <a:p>
+            <a:pPr indent="-285750" lvl="0" marL="457200" rtl="0" algn="l">
+              <a:lnSpc>
+                <a:spcPct val="115000"/>
+              </a:lnSpc>
+              <a:spcBef>
+                <a:spcPts val="220"/>
+              </a:spcBef>
+              <a:spcAft>
+                <a:spcPts val="0"/>
+              </a:spcAft>
+              <a:buClr>
+                <a:srgbClr val="891019"/>
+              </a:buClr>
+              <a:buSzPts val="1600"/>
+              <a:buChar char="•"/>
+            </a:pPr>
+            <a:r>
+              <a:rPr lang="en-US" sz="1800"/>
+              <a:t>Live limit panel surfaces cursor, fetch, and row governor usage</a:t>
+            </a:r>
+            <a:endParaRPr/>
+          </a:p>
+          <a:p>
+            <a:pPr indent="-285750" lvl="0" marL="457200" rtl="0" algn="l">
+              <a:lnSpc>
+                <a:spcPct val="115000"/>
+              </a:lnSpc>
+              <a:spcBef>
+                <a:spcPts val="220"/>
+              </a:spcBef>
+              <a:spcAft>
+                <a:spcPts val="120"/>
+              </a:spcAft>
+              <a:buClr>
+                <a:srgbClr val="891019"/>
+              </a:buClr>
+              <a:buSzPts val="1600"/>
+              <a:buChar char="•"/>
+            </a:pPr>
+            <a:r>
+              <a:rPr lang="en-US" sz="1800"/>
+              <a:t>Switch between standard and pagination cursor modes in one LWC</a:t>
             </a:r>
             <a:endParaRPr/>
           </a:p>
@@ -17414,54 +21298,37 @@
           <a:chExt cx="0" cy="0"/>
         </a:xfrm>
       </p:grpSpPr>
-      <p:sp>
-        <p:nvSpPr>
-          <p:cNvPr id="115" name="Google Shape;115;p14"/>
-          <p:cNvSpPr txBox="1"/>
-          <p:nvPr>
-            <p:ph idx="1" type="body"/>
-          </p:nvPr>
-        </p:nvSpPr>
+      <p:pic>
+        <p:nvPicPr>
+          <p:cNvPr id="117" name="demo2-reporting-drilldown" title="Apex Cursor Demo - Reporting Drill-Down"/>
+          <p:cNvPicPr preferRelativeResize="0"/>
+          <p:nvPr/>
+        </p:nvPicPr>
+        <p:blipFill>
+          <a:blip r:embed="rId3">
+            <a:alphaModFix/>
+          </a:blip>
+          <a:stretch>
+            <a:fillRect/>
+          </a:stretch>
+        </p:blipFill>
         <p:spPr>
           <a:xfrm>
-            <a:off x="338325" y="1020943"/>
-            <a:ext cx="11484900" cy="5257200"/>
+            <a:off x="609412" y="1150000"/>
+            <a:ext cx="10970000" cy="5077734"/>
           </a:xfrm>
           <a:prstGeom prst="rect">
             <a:avLst/>
           </a:prstGeom>
-          <a:noFill/>
-          <a:ln>
-            <a:noFill/>
-          </a:ln>
-        </p:spPr>
-        <p:txBody>
-          <a:bodyPr anchorCtr="0" anchor="t" bIns="0" lIns="9125" spcFirstLastPara="1" rIns="0" wrap="square" tIns="0">
-            <a:noAutofit/>
-          </a:bodyPr>
-          <a:lstStyle/>
-          <a:p>
-            <a:pPr indent="0" lvl="0" marL="0" rtl="0" algn="l">
-              <a:lnSpc>
-                <a:spcPct val="100000"/>
-              </a:lnSpc>
-              <a:spcBef>
-                <a:spcPts val="0"/>
-              </a:spcBef>
-              <a:spcAft>
-                <a:spcPts val="0"/>
-              </a:spcAft>
-              <a:buSzPts val="2400"/>
-              <a:buNone/>
-            </a:pPr>
-            <a:r>
-              <a:rPr lang="en-US"/>
-              <a:t/>
-            </a:r>
-            <a:endParaRPr/>
-          </a:p>
-        </p:txBody>
-      </p:sp>
+          <a:effectLst>
+            <a:outerShdw blurRad="63500" dist="47625" dir="2700000" algn="ctr" rotWithShape="0">
+              <a:srgbClr val="000000">
+                <a:alpha val="38000"/>
+              </a:srgbClr>
+            </a:outerShdw>
+          </a:effectLst>
+        </p:spPr>
+      </p:pic>
       <p:sp>
         <p:nvSpPr>
           <p:cNvPr id="116" name="Google Shape;116;p14"/>
@@ -17540,7 +21407,7 @@
     <p:spTree>
       <p:nvGrpSpPr>
         <p:cNvPr id="114" name="Shape 114"/>
-        <p:cNvGrpSpPr/>
+        <p:cNvSpPr/>
         <p:nvPr/>
       </p:nvGrpSpPr>
       <p:grpSpPr>
@@ -17553,27 +21420,36 @@
       </p:grpSpPr>
       <p:sp>
         <p:nvSpPr>
-          <p:cNvPr id="115" name="Google Shape;115;p14"/>
+          <p:cNvPr id="201" name="highlight-code-1"/>
           <p:cNvSpPr txBox="1"/>
-          <p:nvPr>
-            <p:ph idx="1" type="body"/>
-          </p:nvPr>
+          <p:nvPr/>
         </p:nvSpPr>
         <p:spPr>
           <a:xfrm>
-            <a:off x="338325" y="1020943"/>
-            <a:ext cx="11484900" cy="5257200"/>
-          </a:xfrm>
-          <a:prstGeom prst="rect">
-            <a:avLst/>
+            <a:off x="338325" y="1603500"/>
+            <a:ext cx="3748300" cy="2450000"/>
+          </a:xfrm>
+          <a:prstGeom prst="roundRect">
+            <a:avLst>
+              <a:gd name="adj" fmla="val 6000"/>
+            </a:avLst>
           </a:prstGeom>
-          <a:noFill/>
+          <a:solidFill>
+            <a:srgbClr val="1E1E1E"/>
+          </a:solidFill>
           <a:ln>
             <a:noFill/>
           </a:ln>
+          <a:effectLst>
+            <a:outerShdw blurRad="50800" dist="31750" dir="2700000" algn="ctr" rotWithShape="0">
+              <a:srgbClr val="000000">
+                <a:alpha val="28000"/>
+              </a:srgbClr>
+            </a:outerShdw>
+          </a:effectLst>
         </p:spPr>
         <p:txBody>
-          <a:bodyPr anchorCtr="0" anchor="t" bIns="0" lIns="9125" spcFirstLastPara="1" rIns="0" wrap="square" tIns="0">
+          <a:bodyPr anchorCtr="0" anchor="t" bIns="160000" lIns="72000" rIns="72000" tIns="55000" wrap="square">
             <a:noAutofit/>
           </a:bodyPr>
           <a:lstStyle/>
@@ -17583,17 +21459,792 @@
                 <a:spcPct val="100000"/>
               </a:lnSpc>
               <a:spcBef>
-                <a:spcPts val="0"/>
-              </a:spcBef>
-              <a:spcAft>
-                <a:spcPts val="0"/>
-              </a:spcAft>
-              <a:buSzPts val="2400"/>
+                <a:spcPts val="80"/>
+              </a:spcBef>
+              <a:spcAft>
+                <a:spcPts val="0"/>
+              </a:spcAft>
               <a:buNone/>
             </a:pPr>
             <a:r>
-              <a:rPr lang="en-US"/>
-              <a:t/>
+              <a:rPr lang="en-US" sz="1500" typeface="Consolas">
+                <a:solidFill>
+                  <a:srgbClr val="6A9955"/>
+                </a:solidFill>
+              </a:rPr>
+              <a:t>apex&gt;</a:t>
+            </a:r>
+            <a:endParaRPr/>
+          </a:p>
+          <a:p>
+            <a:pPr indent="0" lvl="0" marL="0" rtl="0" algn="l">
+              <a:lnSpc>
+                <a:spcPct val="100000"/>
+              </a:lnSpc>
+              <a:spcBef>
+                <a:spcPts val="60"/>
+              </a:spcBef>
+              <a:spcAft>
+                <a:spcPts val="0"/>
+              </a:spcAft>
+              <a:buNone/>
+            </a:pPr>
+            <a:r>
+              <a:rPr lang="en-US" sz="1500" typeface="Consolas">
+                <a:solidFill>
+                  <a:srgbClr val="569CD6"/>
+                </a:solidFill>
+              </a:rPr>
+              <a:t>Database.PaginationCursor</a:t>
+            </a:r>
+            <a:r>
+              <a:rPr lang="en-US" sz="1500" typeface="Consolas">
+                <a:solidFill>
+                  <a:srgbClr val="D4D4D4"/>
+                </a:solidFill>
+              </a:rPr>
+              <a:t> pc =</a:t>
+            </a:r>
+            <a:endParaRPr/>
+          </a:p>
+          <a:p>
+            <a:pPr indent="0" lvl="0" marL="0" rtl="0" algn="l">
+              <a:lnSpc>
+                <a:spcPct val="100000"/>
+              </a:lnSpc>
+              <a:spcBef>
+                <a:spcPts val="40"/>
+              </a:spcBef>
+              <a:spcAft>
+                <a:spcPts val="0"/>
+              </a:spcAft>
+              <a:buNone/>
+            </a:pPr>
+            <a:r>
+              <a:rPr lang="en-US" sz="1500" typeface="Consolas">
+                <a:solidFill>
+                  <a:srgbClr val="DCDCAA"/>
+                </a:solidFill>
+              </a:rPr>
+              <a:t>  Database.getPaginationCursor(</a:t>
+            </a:r>
+            <a:endParaRPr/>
+          </a:p>
+          <a:p>
+            <a:pPr indent="0" lvl="0" marL="0" rtl="0" algn="l">
+              <a:lnSpc>
+                <a:spcPct val="100000"/>
+              </a:lnSpc>
+              <a:spcBef>
+                <a:spcPts val="40"/>
+              </a:spcBef>
+              <a:spcAft>
+                <a:spcPts val="0"/>
+              </a:spcAft>
+              <a:buNone/>
+            </a:pPr>
+            <a:r>
+              <a:rPr lang="en-US" sz="1500" typeface="Consolas">
+                <a:solidFill>
+                  <a:srgbClr val="CE9178"/>
+                </a:solidFill>
+              </a:rPr>
+              <a:t>    soql,</a:t>
+            </a:r>
+            <a:endParaRPr/>
+          </a:p>
+          <a:p>
+            <a:pPr indent="0" lvl="0" marL="0" rtl="0" algn="l">
+              <a:lnSpc>
+                <a:spcPct val="100000"/>
+              </a:lnSpc>
+              <a:spcBef>
+                <a:spcPts val="40"/>
+              </a:spcBef>
+              <a:spcAft>
+                <a:spcPts val="0"/>
+              </a:spcAft>
+              <a:buNone/>
+            </a:pPr>
+            <a:r>
+              <a:rPr lang="en-US" sz="1500" typeface="Consolas">
+                <a:solidFill>
+                  <a:srgbClr val="CE9178"/>
+                </a:solidFill>
+              </a:rPr>
+              <a:t>    AccessLevel.USER_MODE);</a:t>
+            </a:r>
+            <a:endParaRPr/>
+          </a:p>
+          <a:p>
+            <a:pPr indent="0" lvl="0" marL="0" rtl="0" algn="l">
+              <a:lnSpc>
+                <a:spcPct val="100000"/>
+              </a:lnSpc>
+              <a:spcBef>
+                <a:spcPts val="40"/>
+              </a:spcBef>
+              <a:spcAft>
+                <a:spcPts val="0"/>
+              </a:spcAft>
+              <a:buNone/>
+            </a:pPr>
+            <a:r>
+              <a:rPr lang="en-US" sz="1500" typeface="Consolas">
+                <a:solidFill>
+                  <a:srgbClr val="DCDCAA"/>
+                </a:solidFill>
+              </a:rPr>
+              <a:t>Cache.Session.put(</a:t>
+            </a:r>
+            <a:endParaRPr/>
+          </a:p>
+          <a:p>
+            <a:pPr indent="0" lvl="0" marL="0" rtl="0" algn="l">
+              <a:lnSpc>
+                <a:spcPct val="100000"/>
+              </a:lnSpc>
+              <a:spcBef>
+                <a:spcPts val="40"/>
+              </a:spcBef>
+              <a:spcAft>
+                <a:spcPts val="160"/>
+              </a:spcAft>
+              <a:buNone/>
+            </a:pPr>
+            <a:r>
+              <a:rPr lang="en-US" sz="1500" typeface="Consolas">
+                <a:solidFill>
+                  <a:srgbClr val="CE9178"/>
+                </a:solidFill>
+              </a:rPr>
+              <a:t>  sessionKey(product), pc);</a:t>
+            </a:r>
+            <a:endParaRPr/>
+          </a:p>
+        </p:txBody>
+      </p:sp>
+      <p:sp>
+        <p:nvSpPr>
+          <p:cNvPr id="202" name="highlight-badge-1"/>
+          <p:cNvSpPr txBox="1"/>
+          <p:nvPr/>
+        </p:nvSpPr>
+        <p:spPr>
+          <a:xfrm>
+            <a:off x="127125" y="1392300"/>
+            <a:ext cx="480000" cy="480000"/>
+          </a:xfrm>
+          <a:prstGeom prst="ellipse">
+            <a:avLst/>
+          </a:prstGeom>
+          <a:solidFill>
+            <a:srgbClr val="891019"/>
+          </a:solidFill>
+          <a:ln>
+            <a:noFill/>
+          </a:ln>
+          <a:effectLst>
+            <a:outerShdw blurRad="57150" dist="38100" dir="2700000" algn="ctr" rotWithShape="0">
+              <a:srgbClr val="000000">
+                <a:alpha val="45000"/>
+              </a:srgbClr>
+            </a:outerShdw>
+          </a:effectLst>
+        </p:spPr>
+        <p:txBody>
+          <a:bodyPr anchor="ctr" anchorCtr="1" wrap="none" lIns="0" rIns="0" tIns="0" bIns="0">
+            <a:noAutofit/>
+          </a:bodyPr>
+          <a:lstStyle/>
+          <a:p>
+            <a:pPr algn="ctr">
+              <a:buNone/>
+            </a:pPr>
+            <a:r>
+              <a:rPr lang="en-US" sz="2400" b="1">
+                <a:solidFill>
+                  <a:srgbClr val="FFFFFF"/>
+                </a:solidFill>
+              </a:rPr>
+              <a:t>1</a:t>
+            </a:r>
+            <a:endParaRPr/>
+          </a:p>
+        </p:txBody>
+      </p:sp>
+      <p:sp>
+        <p:nvSpPr>
+          <p:cNvPr id="203" name="highlight-code-2"/>
+          <p:cNvSpPr txBox="1"/>
+          <p:nvPr/>
+        </p:nvSpPr>
+        <p:spPr>
+          <a:xfrm>
+            <a:off x="4206625" y="1603500"/>
+            <a:ext cx="3748300" cy="2450000"/>
+          </a:xfrm>
+          <a:prstGeom prst="roundRect">
+            <a:avLst>
+              <a:gd name="adj" fmla="val 6000"/>
+            </a:avLst>
+          </a:prstGeom>
+          <a:solidFill>
+            <a:srgbClr val="1E1E1E"/>
+          </a:solidFill>
+          <a:ln>
+            <a:noFill/>
+          </a:ln>
+          <a:effectLst>
+            <a:outerShdw blurRad="50800" dist="31750" dir="2700000" algn="ctr" rotWithShape="0">
+              <a:srgbClr val="000000">
+                <a:alpha val="28000"/>
+              </a:srgbClr>
+            </a:outerShdw>
+          </a:effectLst>
+        </p:spPr>
+        <p:txBody>
+          <a:bodyPr anchorCtr="0" anchor="t" bIns="160000" lIns="72000" rIns="72000" tIns="55000" wrap="square">
+            <a:noAutofit/>
+          </a:bodyPr>
+          <a:lstStyle/>
+          <a:p>
+            <a:pPr indent="0" lvl="0" marL="0" rtl="0" algn="l">
+              <a:lnSpc>
+                <a:spcPct val="100000"/>
+              </a:lnSpc>
+              <a:spcBef>
+                <a:spcPts val="80"/>
+              </a:spcBef>
+              <a:spcAft>
+                <a:spcPts val="0"/>
+              </a:spcAft>
+              <a:buNone/>
+            </a:pPr>
+            <a:r>
+              <a:rPr lang="en-US" sz="1500" typeface="Consolas">
+                <a:solidFill>
+                  <a:srgbClr val="6A9955"/>
+                </a:solidFill>
+              </a:rPr>
+              <a:t>apex&gt;</a:t>
+            </a:r>
+            <a:endParaRPr/>
+          </a:p>
+          <a:p>
+            <a:pPr indent="0" lvl="0" marL="0" rtl="0" algn="l">
+              <a:lnSpc>
+                <a:spcPct val="100000"/>
+              </a:lnSpc>
+              <a:spcBef>
+                <a:spcPts val="60"/>
+              </a:spcBef>
+              <a:spcAft>
+                <a:spcPts val="0"/>
+              </a:spcAft>
+              <a:buNone/>
+            </a:pPr>
+            <a:r>
+              <a:rPr lang="en-US" sz="1500" typeface="Consolas">
+                <a:solidFill>
+                  <a:srgbClr val="DCDCAA"/>
+                </a:solidFill>
+              </a:rPr>
+              <a:t>fetchResult = pc.fetchPage(</a:t>
+            </a:r>
+            <a:endParaRPr/>
+          </a:p>
+          <a:p>
+            <a:pPr indent="0" lvl="0" marL="0" rtl="0" algn="l">
+              <a:lnSpc>
+                <a:spcPct val="100000"/>
+              </a:lnSpc>
+              <a:spcBef>
+                <a:spcPts val="40"/>
+              </a:spcBef>
+              <a:spcAft>
+                <a:spcPts val="0"/>
+              </a:spcAft>
+              <a:buNone/>
+            </a:pPr>
+            <a:r>
+              <a:rPr lang="en-US" sz="1500" typeface="Consolas">
+                <a:solidFill>
+                  <a:srgbClr val="CE9178"/>
+                </a:solidFill>
+              </a:rPr>
+              <a:t>  dayIndex, 1);</a:t>
+            </a:r>
+            <a:endParaRPr/>
+          </a:p>
+          <a:p>
+            <a:pPr indent="0" lvl="0" marL="0" rtl="0" algn="l">
+              <a:lnSpc>
+                <a:spcPct val="100000"/>
+              </a:lnSpc>
+              <a:spcBef>
+                <a:spcPts val="40"/>
+              </a:spcBef>
+              <a:spcAft>
+                <a:spcPts val="0"/>
+              </a:spcAft>
+              <a:buNone/>
+            </a:pPr>
+            <a:r>
+              <a:rPr lang="en-US" sz="1500" typeface="Consolas">
+                <a:solidFill>
+                  <a:srgbClr val="D4D4D4"/>
+                </a:solidFill>
+              </a:rPr>
+              <a:t>deletedRows =</a:t>
+            </a:r>
+            <a:endParaRPr/>
+          </a:p>
+          <a:p>
+            <a:pPr indent="0" lvl="0" marL="0" rtl="0" algn="l">
+              <a:lnSpc>
+                <a:spcPct val="100000"/>
+              </a:lnSpc>
+              <a:spcBef>
+                <a:spcPts val="40"/>
+              </a:spcBef>
+              <a:spcAft>
+                <a:spcPts val="0"/>
+              </a:spcAft>
+              <a:buNone/>
+            </a:pPr>
+            <a:r>
+              <a:rPr lang="en-US" sz="1500" typeface="Consolas">
+                <a:solidFill>
+                  <a:srgbClr val="DCDCAA"/>
+                </a:solidFill>
+              </a:rPr>
+              <a:t>  fetchResult</a:t>
+            </a:r>
+            <a:endParaRPr/>
+          </a:p>
+          <a:p>
+            <a:pPr indent="0" lvl="0" marL="0" rtl="0" algn="l">
+              <a:lnSpc>
+                <a:spcPct val="100000"/>
+              </a:lnSpc>
+              <a:spcBef>
+                <a:spcPts val="40"/>
+              </a:spcBef>
+              <a:spcAft>
+                <a:spcPts val="160"/>
+              </a:spcAft>
+              <a:buNone/>
+            </a:pPr>
+            <a:r>
+              <a:rPr lang="en-US" sz="1500" typeface="Consolas">
+                <a:solidFill>
+                  <a:srgbClr val="CE9178"/>
+                </a:solidFill>
+              </a:rPr>
+              <a:t>    .getNumDeletedRecords();</a:t>
+            </a:r>
+            <a:endParaRPr/>
+          </a:p>
+        </p:txBody>
+      </p:sp>
+      <p:sp>
+        <p:nvSpPr>
+          <p:cNvPr id="204" name="highlight-badge-2"/>
+          <p:cNvSpPr txBox="1"/>
+          <p:nvPr/>
+        </p:nvSpPr>
+        <p:spPr>
+          <a:xfrm>
+            <a:off x="3995425" y="1392300"/>
+            <a:ext cx="480000" cy="480000"/>
+          </a:xfrm>
+          <a:prstGeom prst="ellipse">
+            <a:avLst/>
+          </a:prstGeom>
+          <a:solidFill>
+            <a:srgbClr val="891019"/>
+          </a:solidFill>
+          <a:ln>
+            <a:noFill/>
+          </a:ln>
+          <a:effectLst>
+            <a:outerShdw blurRad="57150" dist="38100" dir="2700000" algn="ctr" rotWithShape="0">
+              <a:srgbClr val="000000">
+                <a:alpha val="45000"/>
+              </a:srgbClr>
+            </a:outerShdw>
+          </a:effectLst>
+        </p:spPr>
+        <p:txBody>
+          <a:bodyPr anchor="ctr" anchorCtr="1" wrap="none" lIns="0" rIns="0" tIns="0" bIns="0">
+            <a:noAutofit/>
+          </a:bodyPr>
+          <a:lstStyle/>
+          <a:p>
+            <a:pPr algn="ctr">
+              <a:buNone/>
+            </a:pPr>
+            <a:r>
+              <a:rPr lang="en-US" sz="2400" b="1">
+                <a:solidFill>
+                  <a:srgbClr val="FFFFFF"/>
+                </a:solidFill>
+              </a:rPr>
+              <a:t>2</a:t>
+            </a:r>
+            <a:endParaRPr/>
+          </a:p>
+        </p:txBody>
+      </p:sp>
+      <p:sp>
+        <p:nvSpPr>
+          <p:cNvPr id="205" name="highlight-code-3"/>
+          <p:cNvSpPr txBox="1"/>
+          <p:nvPr/>
+        </p:nvSpPr>
+        <p:spPr>
+          <a:xfrm>
+            <a:off x="8074925" y="1603500"/>
+            <a:ext cx="3748300" cy="2450000"/>
+          </a:xfrm>
+          <a:prstGeom prst="roundRect">
+            <a:avLst>
+              <a:gd name="adj" fmla="val 6000"/>
+            </a:avLst>
+          </a:prstGeom>
+          <a:solidFill>
+            <a:srgbClr val="1E1E1E"/>
+          </a:solidFill>
+          <a:ln>
+            <a:noFill/>
+          </a:ln>
+          <a:effectLst>
+            <a:outerShdw blurRad="50800" dist="31750" dir="2700000" algn="ctr" rotWithShape="0">
+              <a:srgbClr val="000000">
+                <a:alpha val="28000"/>
+              </a:srgbClr>
+            </a:outerShdw>
+          </a:effectLst>
+        </p:spPr>
+        <p:txBody>
+          <a:bodyPr anchorCtr="0" anchor="t" bIns="160000" lIns="72000" rIns="72000" tIns="55000" wrap="square">
+            <a:noAutofit/>
+          </a:bodyPr>
+          <a:lstStyle/>
+          <a:p>
+            <a:pPr indent="0" lvl="0" marL="0" rtl="0" algn="l">
+              <a:lnSpc>
+                <a:spcPct val="100000"/>
+              </a:lnSpc>
+              <a:spcBef>
+                <a:spcPts val="80"/>
+              </a:spcBef>
+              <a:spcAft>
+                <a:spcPts val="0"/>
+              </a:spcAft>
+              <a:buNone/>
+            </a:pPr>
+            <a:r>
+              <a:rPr lang="en-US" sz="1500" typeface="Consolas">
+                <a:solidFill>
+                  <a:srgbClr val="6A9955"/>
+                </a:solidFill>
+              </a:rPr>
+              <a:t>apex&gt;</a:t>
+            </a:r>
+            <a:endParaRPr/>
+          </a:p>
+          <a:p>
+            <a:pPr indent="0" lvl="0" marL="0" rtl="0" algn="l">
+              <a:lnSpc>
+                <a:spcPct val="100000"/>
+              </a:lnSpc>
+              <a:spcBef>
+                <a:spcPts val="60"/>
+              </a:spcBef>
+              <a:spcAft>
+                <a:spcPts val="0"/>
+              </a:spcAft>
+              <a:buNone/>
+            </a:pPr>
+            <a:r>
+              <a:rPr lang="en-US" sz="1500" typeface="Consolas">
+                <a:solidFill>
+                  <a:srgbClr val="569CD6"/>
+                </a:solidFill>
+              </a:rPr>
+              <a:t>const detail = await</a:t>
+            </a:r>
+            <a:endParaRPr/>
+          </a:p>
+          <a:p>
+            <a:pPr indent="0" lvl="0" marL="0" rtl="0" algn="l">
+              <a:lnSpc>
+                <a:spcPct val="100000"/>
+              </a:lnSpc>
+              <a:spcBef>
+                <a:spcPts val="40"/>
+              </a:spcBef>
+              <a:spcAft>
+                <a:spcPts val="0"/>
+              </a:spcAft>
+              <a:buNone/>
+            </a:pPr>
+            <a:r>
+              <a:rPr lang="en-US" sz="1500" typeface="Consolas">
+                <a:solidFill>
+                  <a:srgbClr val="DCDCAA"/>
+                </a:solidFill>
+              </a:rPr>
+              <a:t>  fetchDetailRange({</a:t>
+            </a:r>
+            <a:endParaRPr/>
+          </a:p>
+          <a:p>
+            <a:pPr indent="0" lvl="0" marL="0" rtl="0" algn="l">
+              <a:lnSpc>
+                <a:spcPct val="100000"/>
+              </a:lnSpc>
+              <a:spcBef>
+                <a:spcPts val="40"/>
+              </a:spcBef>
+              <a:spcAft>
+                <a:spcPts val="0"/>
+              </a:spcAft>
+              <a:buNone/>
+            </a:pPr>
+            <a:r>
+              <a:rPr lang="en-US" sz="1500" typeface="Consolas">
+                <a:solidFill>
+                  <a:srgbClr val="CE9178"/>
+                </a:solidFill>
+              </a:rPr>
+              <a:t>    product,</a:t>
+            </a:r>
+            <a:endParaRPr/>
+          </a:p>
+          <a:p>
+            <a:pPr indent="0" lvl="0" marL="0" rtl="0" algn="l">
+              <a:lnSpc>
+                <a:spcPct val="100000"/>
+              </a:lnSpc>
+              <a:spcBef>
+                <a:spcPts val="40"/>
+              </a:spcBef>
+              <a:spcAft>
+                <a:spcPts val="0"/>
+              </a:spcAft>
+              <a:buNone/>
+            </a:pPr>
+            <a:r>
+              <a:rPr lang="en-US" sz="1500" typeface="Consolas">
+                <a:solidFill>
+                  <a:srgbClr val="CE9178"/>
+                </a:solidFill>
+              </a:rPr>
+              <a:t>    startIndex, endIndex</a:t>
+            </a:r>
+            <a:endParaRPr/>
+          </a:p>
+          <a:p>
+            <a:pPr indent="0" lvl="0" marL="0" rtl="0" algn="l">
+              <a:lnSpc>
+                <a:spcPct val="100000"/>
+              </a:lnSpc>
+              <a:spcBef>
+                <a:spcPts val="40"/>
+              </a:spcBef>
+              <a:spcAft>
+                <a:spcPts val="160"/>
+              </a:spcAft>
+              <a:buNone/>
+            </a:pPr>
+            <a:r>
+              <a:rPr lang="en-US" sz="1500" typeface="Consolas">
+                <a:solidFill>
+                  <a:srgbClr val="DCDCAA"/>
+                </a:solidFill>
+              </a:rPr>
+              <a:t>  });</a:t>
+            </a:r>
+            <a:endParaRPr/>
+          </a:p>
+        </p:txBody>
+      </p:sp>
+      <p:sp>
+        <p:nvSpPr>
+          <p:cNvPr id="206" name="highlight-badge-3"/>
+          <p:cNvSpPr txBox="1"/>
+          <p:nvPr/>
+        </p:nvSpPr>
+        <p:spPr>
+          <a:xfrm>
+            <a:off x="7863725" y="1392300"/>
+            <a:ext cx="480000" cy="480000"/>
+          </a:xfrm>
+          <a:prstGeom prst="ellipse">
+            <a:avLst/>
+          </a:prstGeom>
+          <a:solidFill>
+            <a:srgbClr val="891019"/>
+          </a:solidFill>
+          <a:ln>
+            <a:noFill/>
+          </a:ln>
+          <a:effectLst>
+            <a:outerShdw blurRad="57150" dist="38100" dir="2700000" algn="ctr" rotWithShape="0">
+              <a:srgbClr val="000000">
+                <a:alpha val="45000"/>
+              </a:srgbClr>
+            </a:outerShdw>
+          </a:effectLst>
+        </p:spPr>
+        <p:txBody>
+          <a:bodyPr anchor="ctr" anchorCtr="1" wrap="none" lIns="0" rIns="0" tIns="0" bIns="0">
+            <a:noAutofit/>
+          </a:bodyPr>
+          <a:lstStyle/>
+          <a:p>
+            <a:pPr algn="ctr">
+              <a:buNone/>
+            </a:pPr>
+            <a:r>
+              <a:rPr lang="en-US" sz="2400" b="1">
+                <a:solidFill>
+                  <a:srgbClr val="FFFFFF"/>
+                </a:solidFill>
+              </a:rPr>
+              <a:t>3</a:t>
+            </a:r>
+            <a:endParaRPr/>
+          </a:p>
+        </p:txBody>
+      </p:sp>
+      <p:sp>
+        <p:nvSpPr>
+          <p:cNvPr id="207" name="highlight-info-panel"/>
+          <p:cNvSpPr txBox="1"/>
+          <p:nvPr/>
+        </p:nvSpPr>
+        <p:spPr>
+          <a:xfrm>
+            <a:off x="338325" y="4173500"/>
+            <a:ext cx="11484900" cy="1950000"/>
+          </a:xfrm>
+          <a:prstGeom prst="roundRect">
+            <a:avLst>
+              <a:gd name="adj" fmla="val 6000"/>
+            </a:avLst>
+          </a:prstGeom>
+          <a:solidFill>
+            <a:srgbClr val="F4F7FC"/>
+          </a:solidFill>
+          <a:ln>
+            <a:noFill/>
+          </a:ln>
+          <a:effectLst>
+            <a:outerShdw blurRad="50800" dist="31750" dir="2700000" algn="ctr" rotWithShape="0">
+              <a:srgbClr val="000000">
+                <a:alpha val="28000"/>
+              </a:srgbClr>
+            </a:outerShdw>
+          </a:effectLst>
+        </p:spPr>
+        <p:txBody>
+          <a:bodyPr anchorCtr="0" anchor="t" bIns="120000" lIns="140000" rIns="120000" tIns="120000" wrap="square">
+            <a:noAutofit/>
+          </a:bodyPr>
+          <a:lstStyle/>
+          <a:p>
+            <a:pPr indent="-285750" lvl="0" marL="457200" rtl="0" algn="l">
+              <a:lnSpc>
+                <a:spcPct val="115000"/>
+              </a:lnSpc>
+              <a:spcBef>
+                <a:spcPts val="360"/>
+              </a:spcBef>
+              <a:spcAft>
+                <a:spcPts val="0"/>
+              </a:spcAft>
+              <a:buClr>
+                <a:srgbClr val="891019"/>
+              </a:buClr>
+              <a:buSzPts val="1600"/>
+              <a:buChar char="•"/>
+            </a:pPr>
+            <a:r>
+              <a:rPr lang="en-US" sz="1800"/>
+              <a:t>PaginationCursor builds the monthly chart with one fetchPage per month</a:t>
+            </a:r>
+            <a:endParaRPr/>
+          </a:p>
+          <a:p>
+            <a:pPr indent="-285750" lvl="0" marL="457200" rtl="0" algn="l">
+              <a:lnSpc>
+                <a:spcPct val="115000"/>
+              </a:lnSpc>
+              <a:spcBef>
+                <a:spcPts val="220"/>
+              </a:spcBef>
+              <a:spcAft>
+                <a:spcPts val="0"/>
+              </a:spcAft>
+              <a:buClr>
+                <a:srgbClr val="891019"/>
+              </a:buClr>
+              <a:buSzPts val="1600"/>
+              <a:buChar char="•"/>
+            </a:pPr>
+            <a:r>
+              <a:rPr lang="en-US" sz="1800"/>
+              <a:t>Session cache keeps the cursor for brush-selection drill-down</a:t>
+            </a:r>
+            <a:endParaRPr/>
+          </a:p>
+          <a:p>
+            <a:pPr indent="-285750" lvl="0" marL="457200" rtl="0" algn="l">
+              <a:lnSpc>
+                <a:spcPct val="115000"/>
+              </a:lnSpc>
+              <a:spcBef>
+                <a:spcPts val="220"/>
+              </a:spcBef>
+              <a:spcAft>
+                <a:spcPts val="0"/>
+              </a:spcAft>
+              <a:buClr>
+                <a:srgbClr val="891019"/>
+              </a:buClr>
+              <a:buSzPts val="1600"/>
+              <a:buChar char="•"/>
+            </a:pPr>
+            <a:r>
+              <a:rPr lang="en-US" sz="1800"/>
+              <a:t>Index-based fetchPage maps chart range to daily observation rows</a:t>
+            </a:r>
+            <a:endParaRPr/>
+          </a:p>
+          <a:p>
+            <a:pPr indent="-285750" lvl="0" marL="457200" rtl="0" algn="l">
+              <a:lnSpc>
+                <a:spcPct val="115000"/>
+              </a:lnSpc>
+              <a:spcBef>
+                <a:spcPts val="220"/>
+              </a:spcBef>
+              <a:spcAft>
+                <a:spcPts val="120"/>
+              </a:spcAft>
+              <a:buClr>
+                <a:srgbClr val="891019"/>
+              </a:buClr>
+              <a:buSzPts val="1600"/>
+              <a:buChar char="•"/>
+            </a:pPr>
+            <a:r>
+              <a:rPr lang="en-US" sz="1800"/>
+              <a:t>fetchPage reports deleted rows when underlying data changes</a:t>
             </a:r>
             <a:endParaRPr/>
           </a:p>
